--- a/12.class_and_objects_21_Feb/OOP_Part4.pptx
+++ b/12.class_and_objects_21_Feb/OOP_Part4.pptx
@@ -141,73 +141,13 @@
               <a:rPr b="0" lang="en-IN" sz="2000" spc="-1" strike="noStrike">
                 <a:latin typeface="Arial"/>
               </a:rPr>
-              <a:t>Click </a:t>
+              <a:t>Click to edit the notes </a:t>
             </a:r>
             <a:r>
               <a:rPr b="0" lang="en-IN" sz="2000" spc="-1" strike="noStrike">
                 <a:latin typeface="Arial"/>
               </a:rPr>
-              <a:t>to </a:t>
-            </a:r>
-            <a:r>
-              <a:rPr b="0" lang="en-IN" sz="2000" spc="-1" strike="noStrike">
-                <a:latin typeface="Arial"/>
-              </a:rPr>
-              <a:t>edi</a:t>
-            </a:r>
-            <a:r>
-              <a:rPr b="0" lang="en-IN" sz="2000" spc="-1" strike="noStrike">
-                <a:latin typeface="Arial"/>
-              </a:rPr>
-              <a:t>t </a:t>
-            </a:r>
-            <a:r>
-              <a:rPr b="0" lang="en-IN" sz="2000" spc="-1" strike="noStrike">
-                <a:latin typeface="Arial"/>
-              </a:rPr>
-              <a:t>th</a:t>
-            </a:r>
-            <a:r>
-              <a:rPr b="0" lang="en-IN" sz="2000" spc="-1" strike="noStrike">
-                <a:latin typeface="Arial"/>
-              </a:rPr>
-              <a:t>e </a:t>
-            </a:r>
-            <a:r>
-              <a:rPr b="0" lang="en-IN" sz="2000" spc="-1" strike="noStrike">
-                <a:latin typeface="Arial"/>
-              </a:rPr>
-              <a:t>no</a:t>
-            </a:r>
-            <a:r>
-              <a:rPr b="0" lang="en-IN" sz="2000" spc="-1" strike="noStrike">
-                <a:latin typeface="Arial"/>
-              </a:rPr>
-              <a:t>te</a:t>
-            </a:r>
-            <a:r>
-              <a:rPr b="0" lang="en-IN" sz="2000" spc="-1" strike="noStrike">
-                <a:latin typeface="Arial"/>
-              </a:rPr>
-              <a:t>s </a:t>
-            </a:r>
-            <a:r>
-              <a:rPr b="0" lang="en-IN" sz="2000" spc="-1" strike="noStrike">
-                <a:latin typeface="Arial"/>
-              </a:rPr>
-              <a:t>for</a:t>
-            </a:r>
-            <a:r>
-              <a:rPr b="0" lang="en-IN" sz="2000" spc="-1" strike="noStrike">
-                <a:latin typeface="Arial"/>
-              </a:rPr>
-              <a:t>m</a:t>
-            </a:r>
-            <a:r>
-              <a:rPr b="0" lang="en-IN" sz="2000" spc="-1" strike="noStrike">
-                <a:latin typeface="Arial"/>
-              </a:rPr>
-              <a:t>at</a:t>
+              <a:t>format</a:t>
             </a:r>
             <a:endParaRPr b="0" lang="en-IN" sz="2000" spc="-1" strike="noStrike">
               <a:latin typeface="Arial"/>
@@ -392,7 +332,7 @@
             <a:pPr algn="r">
               <a:buNone/>
             </a:pPr>
-            <a:fld id="{E2BE9DC6-FC8A-4167-8FED-D9B69C742FAF}" type="slidenum">
+            <a:fld id="{DD7D6B46-E3EE-4C82-B76E-29F77297C651}" type="slidenum">
               <a:rPr b="0" lang="en-IN" sz="1400" spc="-1" strike="noStrike">
                 <a:latin typeface="Times New Roman"/>
               </a:rPr>
@@ -440,7 +380,7 @@
         <p:spPr>
           <a:xfrm>
             <a:off x="685800" y="1143000"/>
-            <a:ext cx="5485320" cy="3085200"/>
+            <a:ext cx="5484960" cy="3084840"/>
           </a:xfrm>
           <a:prstGeom prst="rect">
             <a:avLst/>
@@ -463,7 +403,7 @@
         <p:spPr>
           <a:xfrm>
             <a:off x="685800" y="4400640"/>
-            <a:ext cx="5485320" cy="3599280"/>
+            <a:ext cx="5484960" cy="3598920"/>
           </a:xfrm>
           <a:prstGeom prst="rect">
             <a:avLst/>
@@ -497,7 +437,7 @@
         <p:spPr>
           <a:xfrm>
             <a:off x="3884760" y="8685360"/>
-            <a:ext cx="2970720" cy="457560"/>
+            <a:ext cx="2970360" cy="457200"/>
           </a:xfrm>
           <a:prstGeom prst="rect">
             <a:avLst/>
@@ -533,7 +473,7 @@
               </a:lnSpc>
               <a:buNone/>
             </a:pPr>
-            <a:fld id="{CF886EAE-AA90-4355-9642-0836E6F21329}" type="slidenum">
+            <a:fld id="{0E150F09-273A-44B6-9860-61D504B83F63}" type="slidenum">
               <a:rPr b="0" lang="en-US" sz="1200" spc="-1" strike="noStrike">
                 <a:solidFill>
                   <a:srgbClr val="000000"/>
@@ -584,7 +524,7 @@
         <p:spPr>
           <a:xfrm>
             <a:off x="685800" y="1143000"/>
-            <a:ext cx="5485320" cy="3085200"/>
+            <a:ext cx="5484960" cy="3084840"/>
           </a:xfrm>
           <a:prstGeom prst="rect">
             <a:avLst/>
@@ -607,7 +547,7 @@
         <p:spPr>
           <a:xfrm>
             <a:off x="685800" y="4400640"/>
-            <a:ext cx="5485320" cy="3599280"/>
+            <a:ext cx="5484960" cy="3598920"/>
           </a:xfrm>
           <a:prstGeom prst="rect">
             <a:avLst/>
@@ -641,7 +581,7 @@
         <p:spPr>
           <a:xfrm>
             <a:off x="3884760" y="8685360"/>
-            <a:ext cx="2970720" cy="457560"/>
+            <a:ext cx="2970360" cy="457200"/>
           </a:xfrm>
           <a:prstGeom prst="rect">
             <a:avLst/>
@@ -677,7 +617,7 @@
               </a:lnSpc>
               <a:buNone/>
             </a:pPr>
-            <a:fld id="{54E583D7-82BE-40FE-B04A-57D5D2302ABB}" type="slidenum">
+            <a:fld id="{5B6961C1-0B44-4B3A-8A6F-A309F99E27C2}" type="slidenum">
               <a:rPr b="0" lang="en-US" sz="1200" spc="-1" strike="noStrike">
                 <a:solidFill>
                   <a:srgbClr val="000000"/>
@@ -728,7 +668,7 @@
         <p:spPr>
           <a:xfrm>
             <a:off x="685800" y="1143000"/>
-            <a:ext cx="5485320" cy="3085200"/>
+            <a:ext cx="5484960" cy="3084840"/>
           </a:xfrm>
           <a:prstGeom prst="rect">
             <a:avLst/>
@@ -751,7 +691,7 @@
         <p:spPr>
           <a:xfrm>
             <a:off x="685800" y="4400640"/>
-            <a:ext cx="5485320" cy="3599280"/>
+            <a:ext cx="5484960" cy="3598920"/>
           </a:xfrm>
           <a:prstGeom prst="rect">
             <a:avLst/>
@@ -785,7 +725,7 @@
         <p:spPr>
           <a:xfrm>
             <a:off x="3884760" y="8685360"/>
-            <a:ext cx="2970720" cy="457560"/>
+            <a:ext cx="2970360" cy="457200"/>
           </a:xfrm>
           <a:prstGeom prst="rect">
             <a:avLst/>
@@ -821,7 +761,7 @@
               </a:lnSpc>
               <a:buNone/>
             </a:pPr>
-            <a:fld id="{BF34231D-774E-4E4E-91F4-1C50306EFA7E}" type="slidenum">
+            <a:fld id="{F8B9417D-9134-46A3-8865-E7175A560E72}" type="slidenum">
               <a:rPr b="0" lang="en-US" sz="1200" spc="-1" strike="noStrike">
                 <a:solidFill>
                   <a:srgbClr val="000000"/>
@@ -872,7 +812,7 @@
         <p:spPr>
           <a:xfrm>
             <a:off x="685800" y="1143000"/>
-            <a:ext cx="5485320" cy="3085200"/>
+            <a:ext cx="5484960" cy="3084840"/>
           </a:xfrm>
           <a:prstGeom prst="rect">
             <a:avLst/>
@@ -895,7 +835,7 @@
         <p:spPr>
           <a:xfrm>
             <a:off x="685800" y="4400640"/>
-            <a:ext cx="5485320" cy="3599280"/>
+            <a:ext cx="5484960" cy="3598920"/>
           </a:xfrm>
           <a:prstGeom prst="rect">
             <a:avLst/>
@@ -929,7 +869,7 @@
         <p:spPr>
           <a:xfrm>
             <a:off x="3884760" y="8685360"/>
-            <a:ext cx="2970720" cy="457560"/>
+            <a:ext cx="2970360" cy="457200"/>
           </a:xfrm>
           <a:prstGeom prst="rect">
             <a:avLst/>
@@ -965,7 +905,7 @@
               </a:lnSpc>
               <a:buNone/>
             </a:pPr>
-            <a:fld id="{13641539-2526-41B1-BFEC-431CC99B768F}" type="slidenum">
+            <a:fld id="{1467F9BE-B123-451E-8697-08596693070E}" type="slidenum">
               <a:rPr b="0" lang="en-US" sz="1200" spc="-1" strike="noStrike">
                 <a:solidFill>
                   <a:srgbClr val="000000"/>
@@ -1016,7 +956,7 @@
         <p:spPr>
           <a:xfrm>
             <a:off x="685800" y="1143000"/>
-            <a:ext cx="5485320" cy="3085200"/>
+            <a:ext cx="5484960" cy="3084840"/>
           </a:xfrm>
           <a:prstGeom prst="rect">
             <a:avLst/>
@@ -1039,7 +979,7 @@
         <p:spPr>
           <a:xfrm>
             <a:off x="685800" y="4400640"/>
-            <a:ext cx="5485320" cy="3599280"/>
+            <a:ext cx="5484960" cy="3598920"/>
           </a:xfrm>
           <a:prstGeom prst="rect">
             <a:avLst/>
@@ -1073,7 +1013,7 @@
         <p:spPr>
           <a:xfrm>
             <a:off x="3884760" y="8685360"/>
-            <a:ext cx="2970720" cy="457560"/>
+            <a:ext cx="2970360" cy="457200"/>
           </a:xfrm>
           <a:prstGeom prst="rect">
             <a:avLst/>
@@ -1109,7 +1049,7 @@
               </a:lnSpc>
               <a:buNone/>
             </a:pPr>
-            <a:fld id="{CAFDAAF3-0AB8-47EA-BE82-DF6D6A836B82}" type="slidenum">
+            <a:fld id="{F83C97E7-A3A0-41DA-819F-4AD8374AA878}" type="slidenum">
               <a:rPr b="0" lang="en-US" sz="1200" spc="-1" strike="noStrike">
                 <a:solidFill>
                   <a:srgbClr val="000000"/>
@@ -1160,7 +1100,7 @@
         <p:spPr>
           <a:xfrm>
             <a:off x="685800" y="1143000"/>
-            <a:ext cx="5485320" cy="3085200"/>
+            <a:ext cx="5484960" cy="3084840"/>
           </a:xfrm>
           <a:prstGeom prst="rect">
             <a:avLst/>
@@ -1183,7 +1123,7 @@
         <p:spPr>
           <a:xfrm>
             <a:off x="685800" y="4400640"/>
-            <a:ext cx="5485320" cy="3599280"/>
+            <a:ext cx="5484960" cy="3598920"/>
           </a:xfrm>
           <a:prstGeom prst="rect">
             <a:avLst/>
@@ -1217,7 +1157,7 @@
         <p:spPr>
           <a:xfrm>
             <a:off x="3884760" y="8685360"/>
-            <a:ext cx="2970720" cy="457560"/>
+            <a:ext cx="2970360" cy="457200"/>
           </a:xfrm>
           <a:prstGeom prst="rect">
             <a:avLst/>
@@ -1253,7 +1193,7 @@
               </a:lnSpc>
               <a:buNone/>
             </a:pPr>
-            <a:fld id="{4EB5A293-BA7D-4541-B00C-3974C4887ED7}" type="slidenum">
+            <a:fld id="{ECB8EBE6-48FB-483D-8E20-D50CECA2504C}" type="slidenum">
               <a:rPr b="0" lang="en-US" sz="1200" spc="-1" strike="noStrike">
                 <a:solidFill>
                   <a:srgbClr val="000000"/>
@@ -1304,7 +1244,7 @@
         <p:spPr>
           <a:xfrm>
             <a:off x="685800" y="1143000"/>
-            <a:ext cx="5485320" cy="3085200"/>
+            <a:ext cx="5484960" cy="3084840"/>
           </a:xfrm>
           <a:prstGeom prst="rect">
             <a:avLst/>
@@ -1327,7 +1267,7 @@
         <p:spPr>
           <a:xfrm>
             <a:off x="685800" y="4400640"/>
-            <a:ext cx="5485320" cy="3599280"/>
+            <a:ext cx="5484960" cy="3598920"/>
           </a:xfrm>
           <a:prstGeom prst="rect">
             <a:avLst/>
@@ -1361,7 +1301,7 @@
         <p:spPr>
           <a:xfrm>
             <a:off x="3884760" y="8685360"/>
-            <a:ext cx="2970720" cy="457560"/>
+            <a:ext cx="2970360" cy="457200"/>
           </a:xfrm>
           <a:prstGeom prst="rect">
             <a:avLst/>
@@ -1397,7 +1337,7 @@
               </a:lnSpc>
               <a:buNone/>
             </a:pPr>
-            <a:fld id="{1AD49C24-4D7C-4EE7-806F-EB3167256C3D}" type="slidenum">
+            <a:fld id="{3E346826-3593-4E2D-A498-A68775C72C56}" type="slidenum">
               <a:rPr b="0" lang="en-US" sz="1200" spc="-1" strike="noStrike">
                 <a:solidFill>
                   <a:srgbClr val="000000"/>
@@ -1448,7 +1388,7 @@
         <p:spPr>
           <a:xfrm>
             <a:off x="685800" y="1143000"/>
-            <a:ext cx="5485320" cy="3085200"/>
+            <a:ext cx="5484960" cy="3084840"/>
           </a:xfrm>
           <a:prstGeom prst="rect">
             <a:avLst/>
@@ -1471,7 +1411,7 @@
         <p:spPr>
           <a:xfrm>
             <a:off x="685800" y="4400640"/>
-            <a:ext cx="5485320" cy="3599280"/>
+            <a:ext cx="5484960" cy="3598920"/>
           </a:xfrm>
           <a:prstGeom prst="rect">
             <a:avLst/>
@@ -1505,7 +1445,7 @@
         <p:spPr>
           <a:xfrm>
             <a:off x="3884760" y="8685360"/>
-            <a:ext cx="2970720" cy="457560"/>
+            <a:ext cx="2970360" cy="457200"/>
           </a:xfrm>
           <a:prstGeom prst="rect">
             <a:avLst/>
@@ -1541,7 +1481,7 @@
               </a:lnSpc>
               <a:buNone/>
             </a:pPr>
-            <a:fld id="{3035F572-CC37-45B5-8A4F-E470321708B8}" type="slidenum">
+            <a:fld id="{23DCC239-68C5-4F5E-A30F-EA3F2D44FE80}" type="slidenum">
               <a:rPr b="0" lang="en-US" sz="1200" spc="-1" strike="noStrike">
                 <a:solidFill>
                   <a:srgbClr val="000000"/>
@@ -1592,7 +1532,7 @@
         <p:spPr>
           <a:xfrm>
             <a:off x="685800" y="1143000"/>
-            <a:ext cx="5485320" cy="3085200"/>
+            <a:ext cx="5484960" cy="3084840"/>
           </a:xfrm>
           <a:prstGeom prst="rect">
             <a:avLst/>
@@ -1615,7 +1555,7 @@
         <p:spPr>
           <a:xfrm>
             <a:off x="685800" y="4400640"/>
-            <a:ext cx="5485320" cy="3599280"/>
+            <a:ext cx="5484960" cy="3598920"/>
           </a:xfrm>
           <a:prstGeom prst="rect">
             <a:avLst/>
@@ -1649,7 +1589,7 @@
         <p:spPr>
           <a:xfrm>
             <a:off x="3884760" y="8685360"/>
-            <a:ext cx="2970720" cy="457560"/>
+            <a:ext cx="2970360" cy="457200"/>
           </a:xfrm>
           <a:prstGeom prst="rect">
             <a:avLst/>
@@ -1685,7 +1625,7 @@
               </a:lnSpc>
               <a:buNone/>
             </a:pPr>
-            <a:fld id="{1798ECAF-3A3F-4DF9-B485-B7EDB2CF8D5D}" type="slidenum">
+            <a:fld id="{4A8C638F-EFB0-4E9C-B0D9-3DE1D6C1310A}" type="slidenum">
               <a:rPr b="0" lang="en-US" sz="1200" spc="-1" strike="noStrike">
                 <a:solidFill>
                   <a:srgbClr val="000000"/>
@@ -1736,7 +1676,7 @@
         <p:spPr>
           <a:xfrm>
             <a:off x="685800" y="1143000"/>
-            <a:ext cx="5485320" cy="3085200"/>
+            <a:ext cx="5484960" cy="3084840"/>
           </a:xfrm>
           <a:prstGeom prst="rect">
             <a:avLst/>
@@ -1759,7 +1699,7 @@
         <p:spPr>
           <a:xfrm>
             <a:off x="685800" y="4400640"/>
-            <a:ext cx="5485320" cy="3599280"/>
+            <a:ext cx="5484960" cy="3598920"/>
           </a:xfrm>
           <a:prstGeom prst="rect">
             <a:avLst/>
@@ -1793,7 +1733,7 @@
         <p:spPr>
           <a:xfrm>
             <a:off x="3884760" y="8685360"/>
-            <a:ext cx="2970720" cy="457560"/>
+            <a:ext cx="2970360" cy="457200"/>
           </a:xfrm>
           <a:prstGeom prst="rect">
             <a:avLst/>
@@ -1829,7 +1769,7 @@
               </a:lnSpc>
               <a:buNone/>
             </a:pPr>
-            <a:fld id="{8F6279E0-CA8D-4BF3-A856-A8E5111ECBCF}" type="slidenum">
+            <a:fld id="{70C2CC48-4703-4F56-B0C1-673EF254C91E}" type="slidenum">
               <a:rPr b="0" lang="en-US" sz="1200" spc="-1" strike="noStrike">
                 <a:solidFill>
                   <a:srgbClr val="000000"/>
@@ -1880,7 +1820,7 @@
         <p:spPr>
           <a:xfrm>
             <a:off x="685800" y="1143000"/>
-            <a:ext cx="5485320" cy="3085200"/>
+            <a:ext cx="5484960" cy="3084840"/>
           </a:xfrm>
           <a:prstGeom prst="rect">
             <a:avLst/>
@@ -1903,7 +1843,7 @@
         <p:spPr>
           <a:xfrm>
             <a:off x="685800" y="4400640"/>
-            <a:ext cx="5485320" cy="3599280"/>
+            <a:ext cx="5484960" cy="3598920"/>
           </a:xfrm>
           <a:prstGeom prst="rect">
             <a:avLst/>
@@ -1937,7 +1877,7 @@
         <p:spPr>
           <a:xfrm>
             <a:off x="3884760" y="8685360"/>
-            <a:ext cx="2970720" cy="457560"/>
+            <a:ext cx="2970360" cy="457200"/>
           </a:xfrm>
           <a:prstGeom prst="rect">
             <a:avLst/>
@@ -1973,7 +1913,7 @@
               </a:lnSpc>
               <a:buNone/>
             </a:pPr>
-            <a:fld id="{3A20E533-2D29-4DF2-AEF7-FEBA9F8ECDAD}" type="slidenum">
+            <a:fld id="{A4811B43-3B3B-4390-9B5E-9559FE8FFF6E}" type="slidenum">
               <a:rPr b="0" lang="en-US" sz="1200" spc="-1" strike="noStrike">
                 <a:solidFill>
                   <a:srgbClr val="000000"/>
@@ -2024,7 +1964,7 @@
         <p:spPr>
           <a:xfrm>
             <a:off x="685800" y="1143000"/>
-            <a:ext cx="5485320" cy="3085200"/>
+            <a:ext cx="5484960" cy="3084840"/>
           </a:xfrm>
           <a:prstGeom prst="rect">
             <a:avLst/>
@@ -2047,7 +1987,7 @@
         <p:spPr>
           <a:xfrm>
             <a:off x="685800" y="4400640"/>
-            <a:ext cx="5485320" cy="3599280"/>
+            <a:ext cx="5484960" cy="3598920"/>
           </a:xfrm>
           <a:prstGeom prst="rect">
             <a:avLst/>
@@ -2081,7 +2021,7 @@
         <p:spPr>
           <a:xfrm>
             <a:off x="3884760" y="8685360"/>
-            <a:ext cx="2970720" cy="457560"/>
+            <a:ext cx="2970360" cy="457200"/>
           </a:xfrm>
           <a:prstGeom prst="rect">
             <a:avLst/>
@@ -2117,7 +2057,7 @@
               </a:lnSpc>
               <a:buNone/>
             </a:pPr>
-            <a:fld id="{A102ECC9-5B8B-4A2D-82F2-92AA7850089F}" type="slidenum">
+            <a:fld id="{CC205B0B-6B05-4C34-9005-C4C2555A8F05}" type="slidenum">
               <a:rPr b="0" lang="en-US" sz="1200" spc="-1" strike="noStrike">
                 <a:solidFill>
                   <a:srgbClr val="000000"/>
@@ -2168,7 +2108,7 @@
         <p:spPr>
           <a:xfrm>
             <a:off x="685800" y="1143000"/>
-            <a:ext cx="5485320" cy="3085200"/>
+            <a:ext cx="5484960" cy="3084840"/>
           </a:xfrm>
           <a:prstGeom prst="rect">
             <a:avLst/>
@@ -2191,7 +2131,7 @@
         <p:spPr>
           <a:xfrm>
             <a:off x="685800" y="4400640"/>
-            <a:ext cx="5485320" cy="3599280"/>
+            <a:ext cx="5484960" cy="3598920"/>
           </a:xfrm>
           <a:prstGeom prst="rect">
             <a:avLst/>
@@ -2225,7 +2165,7 @@
         <p:spPr>
           <a:xfrm>
             <a:off x="3884760" y="8685360"/>
-            <a:ext cx="2970720" cy="457560"/>
+            <a:ext cx="2970360" cy="457200"/>
           </a:xfrm>
           <a:prstGeom prst="rect">
             <a:avLst/>
@@ -2261,7 +2201,7 @@
               </a:lnSpc>
               <a:buNone/>
             </a:pPr>
-            <a:fld id="{2A2E230B-E63A-4DEE-A2D9-2F7880076E98}" type="slidenum">
+            <a:fld id="{D6C858B0-46F4-4254-A273-1B0CE85E30DB}" type="slidenum">
               <a:rPr b="0" lang="en-US" sz="1200" spc="-1" strike="noStrike">
                 <a:solidFill>
                   <a:srgbClr val="000000"/>
@@ -2312,7 +2252,7 @@
         <p:spPr>
           <a:xfrm>
             <a:off x="685800" y="1143000"/>
-            <a:ext cx="5485320" cy="3085200"/>
+            <a:ext cx="5484960" cy="3084840"/>
           </a:xfrm>
           <a:prstGeom prst="rect">
             <a:avLst/>
@@ -2335,7 +2275,7 @@
         <p:spPr>
           <a:xfrm>
             <a:off x="685800" y="4400640"/>
-            <a:ext cx="5485320" cy="3599280"/>
+            <a:ext cx="5484960" cy="3598920"/>
           </a:xfrm>
           <a:prstGeom prst="rect">
             <a:avLst/>
@@ -2369,7 +2309,7 @@
         <p:spPr>
           <a:xfrm>
             <a:off x="3884760" y="8685360"/>
-            <a:ext cx="2970720" cy="457560"/>
+            <a:ext cx="2970360" cy="457200"/>
           </a:xfrm>
           <a:prstGeom prst="rect">
             <a:avLst/>
@@ -2405,7 +2345,7 @@
               </a:lnSpc>
               <a:buNone/>
             </a:pPr>
-            <a:fld id="{7FB8E75D-4E42-4D0F-A1DF-705D124F9377}" type="slidenum">
+            <a:fld id="{8F126505-C850-45E2-B225-668953169CAC}" type="slidenum">
               <a:rPr b="0" lang="en-US" sz="1200" spc="-1" strike="noStrike">
                 <a:solidFill>
                   <a:srgbClr val="000000"/>
@@ -2456,7 +2396,7 @@
         <p:spPr>
           <a:xfrm>
             <a:off x="685800" y="1143000"/>
-            <a:ext cx="5485320" cy="3085200"/>
+            <a:ext cx="5484960" cy="3084840"/>
           </a:xfrm>
           <a:prstGeom prst="rect">
             <a:avLst/>
@@ -2479,7 +2419,7 @@
         <p:spPr>
           <a:xfrm>
             <a:off x="685800" y="4400640"/>
-            <a:ext cx="5485320" cy="3599280"/>
+            <a:ext cx="5484960" cy="3598920"/>
           </a:xfrm>
           <a:prstGeom prst="rect">
             <a:avLst/>
@@ -2513,7 +2453,7 @@
         <p:spPr>
           <a:xfrm>
             <a:off x="3884760" y="8685360"/>
-            <a:ext cx="2970720" cy="457560"/>
+            <a:ext cx="2970360" cy="457200"/>
           </a:xfrm>
           <a:prstGeom prst="rect">
             <a:avLst/>
@@ -2549,7 +2489,7 @@
               </a:lnSpc>
               <a:buNone/>
             </a:pPr>
-            <a:fld id="{C35FCBAE-C159-4E36-BFC0-8AC4D24E652B}" type="slidenum">
+            <a:fld id="{C5CADC19-823D-45AB-937E-39C03A7B0806}" type="slidenum">
               <a:rPr b="0" lang="en-US" sz="1200" spc="-1" strike="noStrike">
                 <a:solidFill>
                   <a:srgbClr val="000000"/>
@@ -2600,7 +2540,7 @@
         <p:spPr>
           <a:xfrm>
             <a:off x="685800" y="1143000"/>
-            <a:ext cx="5485320" cy="3085200"/>
+            <a:ext cx="5484960" cy="3084840"/>
           </a:xfrm>
           <a:prstGeom prst="rect">
             <a:avLst/>
@@ -2623,7 +2563,7 @@
         <p:spPr>
           <a:xfrm>
             <a:off x="685800" y="4400640"/>
-            <a:ext cx="5485320" cy="3599280"/>
+            <a:ext cx="5484960" cy="3598920"/>
           </a:xfrm>
           <a:prstGeom prst="rect">
             <a:avLst/>
@@ -2657,7 +2597,7 @@
         <p:spPr>
           <a:xfrm>
             <a:off x="3884760" y="8685360"/>
-            <a:ext cx="2970720" cy="457560"/>
+            <a:ext cx="2970360" cy="457200"/>
           </a:xfrm>
           <a:prstGeom prst="rect">
             <a:avLst/>
@@ -2693,7 +2633,7 @@
               </a:lnSpc>
               <a:buNone/>
             </a:pPr>
-            <a:fld id="{EE481BF8-B6E1-4E14-9CDB-6D2FF5BAC236}" type="slidenum">
+            <a:fld id="{ED7432E7-D116-45B7-BCAD-11D3F6C28EDC}" type="slidenum">
               <a:rPr b="0" lang="en-US" sz="1200" spc="-1" strike="noStrike">
                 <a:solidFill>
                   <a:srgbClr val="000000"/>
@@ -2744,7 +2684,7 @@
         <p:spPr>
           <a:xfrm>
             <a:off x="685800" y="1143000"/>
-            <a:ext cx="5485320" cy="3085200"/>
+            <a:ext cx="5484960" cy="3084840"/>
           </a:xfrm>
           <a:prstGeom prst="rect">
             <a:avLst/>
@@ -2767,7 +2707,7 @@
         <p:spPr>
           <a:xfrm>
             <a:off x="685800" y="4400640"/>
-            <a:ext cx="5485320" cy="3599280"/>
+            <a:ext cx="5484960" cy="3598920"/>
           </a:xfrm>
           <a:prstGeom prst="rect">
             <a:avLst/>
@@ -2801,7 +2741,7 @@
         <p:spPr>
           <a:xfrm>
             <a:off x="3884760" y="8685360"/>
-            <a:ext cx="2970720" cy="457560"/>
+            <a:ext cx="2970360" cy="457200"/>
           </a:xfrm>
           <a:prstGeom prst="rect">
             <a:avLst/>
@@ -2837,7 +2777,7 @@
               </a:lnSpc>
               <a:buNone/>
             </a:pPr>
-            <a:fld id="{420080DA-8B7D-4ACD-AB24-44AFD819920D}" type="slidenum">
+            <a:fld id="{357A695B-0BC5-4A45-A400-6E9D7202B9A5}" type="slidenum">
               <a:rPr b="0" lang="en-US" sz="1200" spc="-1" strike="noStrike">
                 <a:solidFill>
                   <a:srgbClr val="000000"/>
@@ -4703,7 +4643,7 @@
         <p:spPr>
           <a:xfrm>
             <a:off x="0" y="4114800"/>
-            <a:ext cx="9142920" cy="1027800"/>
+            <a:ext cx="9142560" cy="1027440"/>
           </a:xfrm>
           <a:prstGeom prst="rect">
             <a:avLst/>
@@ -4734,7 +4674,7 @@
         <p:spPr>
           <a:xfrm>
             <a:off x="457200" y="1097280"/>
-            <a:ext cx="108720" cy="2787840"/>
+            <a:ext cx="108360" cy="2787480"/>
           </a:xfrm>
           <a:prstGeom prst="rect">
             <a:avLst/>
@@ -4765,7 +4705,7 @@
         <p:spPr>
           <a:xfrm>
             <a:off x="777240" y="1097280"/>
-            <a:ext cx="7771320" cy="776160"/>
+            <a:ext cx="7770960" cy="775800"/>
           </a:xfrm>
           <a:prstGeom prst="rect">
             <a:avLst/>
@@ -4820,7 +4760,7 @@
         <p:spPr>
           <a:xfrm>
             <a:off x="777240" y="1874520"/>
-            <a:ext cx="7771320" cy="748800"/>
+            <a:ext cx="7770960" cy="748440"/>
           </a:xfrm>
           <a:prstGeom prst="rect">
             <a:avLst/>
@@ -4875,7 +4815,7 @@
         <p:spPr>
           <a:xfrm>
             <a:off x="777240" y="2724840"/>
-            <a:ext cx="7314120" cy="383040"/>
+            <a:ext cx="7313760" cy="382680"/>
           </a:xfrm>
           <a:prstGeom prst="rect">
             <a:avLst/>
@@ -4930,7 +4870,7 @@
         <p:spPr>
           <a:xfrm>
             <a:off x="457200" y="4206240"/>
-            <a:ext cx="8228520" cy="291600"/>
+            <a:ext cx="8228160" cy="291240"/>
           </a:xfrm>
           <a:prstGeom prst="rect">
             <a:avLst/>
@@ -4985,7 +4925,7 @@
         <p:spPr>
           <a:xfrm>
             <a:off x="6949440" y="228600"/>
-            <a:ext cx="2559240" cy="2559240"/>
+            <a:ext cx="2558880" cy="2558880"/>
           </a:xfrm>
           <a:prstGeom prst="ellipse">
             <a:avLst/>
@@ -5020,7 +4960,7 @@
         <p:spPr>
           <a:xfrm>
             <a:off x="7589520" y="1325880"/>
-            <a:ext cx="1370520" cy="1370520"/>
+            <a:ext cx="1370160" cy="1370160"/>
           </a:xfrm>
           <a:prstGeom prst="ellipse">
             <a:avLst/>
@@ -5092,7 +5032,7 @@
         <p:spPr>
           <a:xfrm>
             <a:off x="0" y="0"/>
-            <a:ext cx="9142920" cy="1004760"/>
+            <a:ext cx="9142560" cy="1004400"/>
           </a:xfrm>
           <a:prstGeom prst="rect">
             <a:avLst/>
@@ -5123,7 +5063,7 @@
         <p:spPr>
           <a:xfrm>
             <a:off x="0" y="0"/>
-            <a:ext cx="108720" cy="1004760"/>
+            <a:ext cx="108360" cy="1004400"/>
           </a:xfrm>
           <a:prstGeom prst="rect">
             <a:avLst/>
@@ -5154,7 +5094,7 @@
         <p:spPr>
           <a:xfrm>
             <a:off x="255960" y="128160"/>
-            <a:ext cx="8502840" cy="547560"/>
+            <a:ext cx="8502480" cy="547200"/>
           </a:xfrm>
           <a:prstGeom prst="rect">
             <a:avLst/>
@@ -5209,7 +5149,7 @@
         <p:spPr>
           <a:xfrm>
             <a:off x="255960" y="658440"/>
-            <a:ext cx="8502840" cy="273240"/>
+            <a:ext cx="8502480" cy="272880"/>
           </a:xfrm>
           <a:prstGeom prst="rect">
             <a:avLst/>
@@ -5264,7 +5204,7 @@
         <p:spPr>
           <a:xfrm>
             <a:off x="320040" y="1143000"/>
-            <a:ext cx="2742120" cy="3912480"/>
+            <a:ext cx="2741760" cy="3912120"/>
           </a:xfrm>
           <a:prstGeom prst="rect">
             <a:avLst/>
@@ -5302,7 +5242,7 @@
         <p:spPr>
           <a:xfrm>
             <a:off x="320040" y="1143000"/>
-            <a:ext cx="2742120" cy="346320"/>
+            <a:ext cx="2741760" cy="345960"/>
           </a:xfrm>
           <a:prstGeom prst="rect">
             <a:avLst/>
@@ -5333,7 +5273,7 @@
         <p:spPr>
           <a:xfrm>
             <a:off x="429840" y="1143000"/>
-            <a:ext cx="2513520" cy="346320"/>
+            <a:ext cx="2513160" cy="345960"/>
           </a:xfrm>
           <a:prstGeom prst="rect">
             <a:avLst/>
@@ -5388,7 +5328,7 @@
         <p:spPr>
           <a:xfrm>
             <a:off x="411480" y="1536120"/>
-            <a:ext cx="2559240" cy="383040"/>
+            <a:ext cx="2558880" cy="382680"/>
           </a:xfrm>
           <a:prstGeom prst="rect">
             <a:avLst/>
@@ -5426,7 +5366,7 @@
         <p:spPr>
           <a:xfrm>
             <a:off x="411480" y="1536120"/>
-            <a:ext cx="2559240" cy="383040"/>
+            <a:ext cx="2558880" cy="382680"/>
           </a:xfrm>
           <a:prstGeom prst="rect">
             <a:avLst/>
@@ -5481,7 +5421,7 @@
         <p:spPr>
           <a:xfrm>
             <a:off x="393120" y="1956960"/>
-            <a:ext cx="2604960" cy="2577600"/>
+            <a:ext cx="2604600" cy="2577240"/>
           </a:xfrm>
           <a:prstGeom prst="rect">
             <a:avLst/>
@@ -5512,7 +5452,7 @@
         <p:spPr>
           <a:xfrm>
             <a:off x="393120" y="1956960"/>
-            <a:ext cx="565920" cy="200160"/>
+            <a:ext cx="565560" cy="199800"/>
           </a:xfrm>
           <a:prstGeom prst="rect">
             <a:avLst/>
@@ -5543,7 +5483,7 @@
         <p:spPr>
           <a:xfrm>
             <a:off x="393120" y="1956960"/>
-            <a:ext cx="565920" cy="200160"/>
+            <a:ext cx="565560" cy="199800"/>
           </a:xfrm>
           <a:prstGeom prst="rect">
             <a:avLst/>
@@ -5598,7 +5538,7 @@
         <p:spPr>
           <a:xfrm>
             <a:off x="484560" y="2212920"/>
-            <a:ext cx="2422080" cy="2275920"/>
+            <a:ext cx="2421720" cy="2275560"/>
           </a:xfrm>
           <a:prstGeom prst="rect">
             <a:avLst/>
@@ -6065,7 +6005,7 @@
         <p:spPr>
           <a:xfrm>
             <a:off x="411480" y="4572000"/>
-            <a:ext cx="2559240" cy="383040"/>
+            <a:ext cx="2558880" cy="382680"/>
           </a:xfrm>
           <a:prstGeom prst="rect">
             <a:avLst/>
@@ -6103,7 +6043,7 @@
         <p:spPr>
           <a:xfrm>
             <a:off x="411480" y="4572000"/>
-            <a:ext cx="2559240" cy="383040"/>
+            <a:ext cx="2558880" cy="382680"/>
           </a:xfrm>
           <a:prstGeom prst="rect">
             <a:avLst/>
@@ -6158,7 +6098,7 @@
         <p:spPr>
           <a:xfrm>
             <a:off x="3218760" y="1143000"/>
-            <a:ext cx="2742120" cy="3912480"/>
+            <a:ext cx="2741760" cy="3912120"/>
           </a:xfrm>
           <a:prstGeom prst="rect">
             <a:avLst/>
@@ -6196,7 +6136,7 @@
         <p:spPr>
           <a:xfrm>
             <a:off x="3218760" y="1143000"/>
-            <a:ext cx="2742120" cy="346320"/>
+            <a:ext cx="2741760" cy="345960"/>
           </a:xfrm>
           <a:prstGeom prst="rect">
             <a:avLst/>
@@ -6227,7 +6167,7 @@
         <p:spPr>
           <a:xfrm>
             <a:off x="3328560" y="1143000"/>
-            <a:ext cx="2513520" cy="346320"/>
+            <a:ext cx="2513160" cy="345960"/>
           </a:xfrm>
           <a:prstGeom prst="rect">
             <a:avLst/>
@@ -6282,7 +6222,7 @@
         <p:spPr>
           <a:xfrm>
             <a:off x="3310200" y="1536120"/>
-            <a:ext cx="2559240" cy="383040"/>
+            <a:ext cx="2558880" cy="382680"/>
           </a:xfrm>
           <a:prstGeom prst="rect">
             <a:avLst/>
@@ -6320,7 +6260,7 @@
         <p:spPr>
           <a:xfrm>
             <a:off x="3310200" y="1536120"/>
-            <a:ext cx="2559240" cy="383040"/>
+            <a:ext cx="2558880" cy="382680"/>
           </a:xfrm>
           <a:prstGeom prst="rect">
             <a:avLst/>
@@ -6375,7 +6315,7 @@
         <p:spPr>
           <a:xfrm>
             <a:off x="3291840" y="1956960"/>
-            <a:ext cx="2604960" cy="2577600"/>
+            <a:ext cx="2604600" cy="2577240"/>
           </a:xfrm>
           <a:prstGeom prst="rect">
             <a:avLst/>
@@ -6406,7 +6346,7 @@
         <p:spPr>
           <a:xfrm>
             <a:off x="3291840" y="1956960"/>
-            <a:ext cx="565920" cy="200160"/>
+            <a:ext cx="565560" cy="199800"/>
           </a:xfrm>
           <a:prstGeom prst="rect">
             <a:avLst/>
@@ -6437,7 +6377,7 @@
         <p:spPr>
           <a:xfrm>
             <a:off x="3291840" y="1956960"/>
-            <a:ext cx="565920" cy="200160"/>
+            <a:ext cx="565560" cy="199800"/>
           </a:xfrm>
           <a:prstGeom prst="rect">
             <a:avLst/>
@@ -6492,7 +6432,7 @@
         <p:spPr>
           <a:xfrm>
             <a:off x="3383280" y="2212920"/>
-            <a:ext cx="2422080" cy="2275920"/>
+            <a:ext cx="2421720" cy="2275560"/>
           </a:xfrm>
           <a:prstGeom prst="rect">
             <a:avLst/>
@@ -6905,7 +6845,7 @@
         <p:spPr>
           <a:xfrm>
             <a:off x="3310200" y="4572000"/>
-            <a:ext cx="2559240" cy="383040"/>
+            <a:ext cx="2558880" cy="382680"/>
           </a:xfrm>
           <a:prstGeom prst="rect">
             <a:avLst/>
@@ -6943,7 +6883,7 @@
         <p:spPr>
           <a:xfrm>
             <a:off x="3310200" y="4572000"/>
-            <a:ext cx="2559240" cy="383040"/>
+            <a:ext cx="2558880" cy="382680"/>
           </a:xfrm>
           <a:prstGeom prst="rect">
             <a:avLst/>
@@ -6998,7 +6938,7 @@
         <p:spPr>
           <a:xfrm>
             <a:off x="6108120" y="1143000"/>
-            <a:ext cx="2742120" cy="3912480"/>
+            <a:ext cx="2741760" cy="3912120"/>
           </a:xfrm>
           <a:prstGeom prst="rect">
             <a:avLst/>
@@ -7036,7 +6976,7 @@
         <p:spPr>
           <a:xfrm>
             <a:off x="6108120" y="1143000"/>
-            <a:ext cx="2742120" cy="346320"/>
+            <a:ext cx="2741760" cy="345960"/>
           </a:xfrm>
           <a:prstGeom prst="rect">
             <a:avLst/>
@@ -7067,7 +7007,7 @@
         <p:spPr>
           <a:xfrm>
             <a:off x="6217920" y="1143000"/>
-            <a:ext cx="2513520" cy="346320"/>
+            <a:ext cx="2513160" cy="345960"/>
           </a:xfrm>
           <a:prstGeom prst="rect">
             <a:avLst/>
@@ -7122,7 +7062,7 @@
         <p:spPr>
           <a:xfrm>
             <a:off x="6199560" y="1536120"/>
-            <a:ext cx="2559240" cy="383040"/>
+            <a:ext cx="2558880" cy="382680"/>
           </a:xfrm>
           <a:prstGeom prst="rect">
             <a:avLst/>
@@ -7160,7 +7100,7 @@
         <p:spPr>
           <a:xfrm>
             <a:off x="6199560" y="1536120"/>
-            <a:ext cx="2559240" cy="383040"/>
+            <a:ext cx="2558880" cy="382680"/>
           </a:xfrm>
           <a:prstGeom prst="rect">
             <a:avLst/>
@@ -7215,7 +7155,7 @@
         <p:spPr>
           <a:xfrm>
             <a:off x="6181200" y="1956960"/>
-            <a:ext cx="2604960" cy="2577600"/>
+            <a:ext cx="2604600" cy="2577240"/>
           </a:xfrm>
           <a:prstGeom prst="rect">
             <a:avLst/>
@@ -7246,7 +7186,7 @@
         <p:spPr>
           <a:xfrm>
             <a:off x="6181200" y="1956960"/>
-            <a:ext cx="565920" cy="200160"/>
+            <a:ext cx="565560" cy="199800"/>
           </a:xfrm>
           <a:prstGeom prst="rect">
             <a:avLst/>
@@ -7277,7 +7217,7 @@
         <p:spPr>
           <a:xfrm>
             <a:off x="6181200" y="1956960"/>
-            <a:ext cx="565920" cy="200160"/>
+            <a:ext cx="565560" cy="199800"/>
           </a:xfrm>
           <a:prstGeom prst="rect">
             <a:avLst/>
@@ -7332,7 +7272,7 @@
         <p:spPr>
           <a:xfrm>
             <a:off x="6272640" y="2212920"/>
-            <a:ext cx="2422080" cy="2275920"/>
+            <a:ext cx="2421720" cy="2275560"/>
           </a:xfrm>
           <a:prstGeom prst="rect">
             <a:avLst/>
@@ -7765,7 +7705,7 @@
         <p:spPr>
           <a:xfrm>
             <a:off x="6199560" y="4572000"/>
-            <a:ext cx="2559240" cy="383040"/>
+            <a:ext cx="2558880" cy="382680"/>
           </a:xfrm>
           <a:prstGeom prst="rect">
             <a:avLst/>
@@ -7803,7 +7743,7 @@
         <p:spPr>
           <a:xfrm>
             <a:off x="6199560" y="4572000"/>
-            <a:ext cx="2559240" cy="383040"/>
+            <a:ext cx="2558880" cy="382680"/>
           </a:xfrm>
           <a:prstGeom prst="rect">
             <a:avLst/>
@@ -7895,7 +7835,7 @@
         <p:spPr>
           <a:xfrm>
             <a:off x="0" y="0"/>
-            <a:ext cx="9142920" cy="1004760"/>
+            <a:ext cx="9142560" cy="1004400"/>
           </a:xfrm>
           <a:prstGeom prst="rect">
             <a:avLst/>
@@ -7926,7 +7866,7 @@
         <p:spPr>
           <a:xfrm>
             <a:off x="0" y="0"/>
-            <a:ext cx="108720" cy="1004760"/>
+            <a:ext cx="108360" cy="1004400"/>
           </a:xfrm>
           <a:prstGeom prst="rect">
             <a:avLst/>
@@ -7957,7 +7897,7 @@
         <p:spPr>
           <a:xfrm>
             <a:off x="255960" y="128160"/>
-            <a:ext cx="8502840" cy="547560"/>
+            <a:ext cx="8502480" cy="547200"/>
           </a:xfrm>
           <a:prstGeom prst="rect">
             <a:avLst/>
@@ -8012,7 +7952,7 @@
         <p:spPr>
           <a:xfrm>
             <a:off x="255960" y="658440"/>
-            <a:ext cx="8502840" cy="273240"/>
+            <a:ext cx="8502480" cy="272880"/>
           </a:xfrm>
           <a:prstGeom prst="rect">
             <a:avLst/>
@@ -8067,7 +8007,7 @@
         <p:spPr>
           <a:xfrm>
             <a:off x="320040" y="1143000"/>
-            <a:ext cx="4113720" cy="2193480"/>
+            <a:ext cx="4113360" cy="2193120"/>
           </a:xfrm>
           <a:prstGeom prst="rect">
             <a:avLst/>
@@ -8105,7 +8045,7 @@
         <p:spPr>
           <a:xfrm>
             <a:off x="457200" y="1261800"/>
-            <a:ext cx="3747960" cy="273240"/>
+            <a:ext cx="3747600" cy="272880"/>
           </a:xfrm>
           <a:prstGeom prst="rect">
             <a:avLst/>
@@ -8160,7 +8100,7 @@
         <p:spPr>
           <a:xfrm>
             <a:off x="457200" y="1572840"/>
-            <a:ext cx="3747960" cy="346320"/>
+            <a:ext cx="3747600" cy="345960"/>
           </a:xfrm>
           <a:prstGeom prst="rect">
             <a:avLst/>
@@ -8215,7 +8155,7 @@
         <p:spPr>
           <a:xfrm>
             <a:off x="365760" y="1956960"/>
-            <a:ext cx="4003920" cy="1260720"/>
+            <a:ext cx="4003560" cy="1260360"/>
           </a:xfrm>
           <a:prstGeom prst="rect">
             <a:avLst/>
@@ -8246,7 +8186,7 @@
         <p:spPr>
           <a:xfrm>
             <a:off x="365760" y="1956960"/>
-            <a:ext cx="565920" cy="200160"/>
+            <a:ext cx="565560" cy="199800"/>
           </a:xfrm>
           <a:prstGeom prst="rect">
             <a:avLst/>
@@ -8277,7 +8217,7 @@
         <p:spPr>
           <a:xfrm>
             <a:off x="365760" y="1956960"/>
-            <a:ext cx="565920" cy="200160"/>
+            <a:ext cx="565560" cy="199800"/>
           </a:xfrm>
           <a:prstGeom prst="rect">
             <a:avLst/>
@@ -8332,7 +8272,7 @@
         <p:spPr>
           <a:xfrm>
             <a:off x="457200" y="2212920"/>
-            <a:ext cx="3821040" cy="959040"/>
+            <a:ext cx="3820680" cy="958680"/>
           </a:xfrm>
           <a:prstGeom prst="rect">
             <a:avLst/>
@@ -8527,7 +8467,7 @@
         <p:spPr>
           <a:xfrm>
             <a:off x="4709160" y="1143000"/>
-            <a:ext cx="4113720" cy="2193480"/>
+            <a:ext cx="4113360" cy="2193120"/>
           </a:xfrm>
           <a:prstGeom prst="rect">
             <a:avLst/>
@@ -8565,7 +8505,7 @@
         <p:spPr>
           <a:xfrm>
             <a:off x="4846320" y="1261800"/>
-            <a:ext cx="3747960" cy="273240"/>
+            <a:ext cx="3747600" cy="272880"/>
           </a:xfrm>
           <a:prstGeom prst="rect">
             <a:avLst/>
@@ -8620,7 +8560,7 @@
         <p:spPr>
           <a:xfrm>
             <a:off x="4846320" y="1627560"/>
-            <a:ext cx="3821040" cy="803520"/>
+            <a:ext cx="3820680" cy="803160"/>
           </a:xfrm>
           <a:prstGeom prst="rect">
             <a:avLst/>
@@ -8658,7 +8598,7 @@
         <p:spPr>
           <a:xfrm>
             <a:off x="4846320" y="1627560"/>
-            <a:ext cx="72000" cy="803520"/>
+            <a:ext cx="71640" cy="803160"/>
           </a:xfrm>
           <a:prstGeom prst="rect">
             <a:avLst/>
@@ -8689,7 +8629,7 @@
         <p:spPr>
           <a:xfrm>
             <a:off x="5010840" y="1627560"/>
-            <a:ext cx="1507680" cy="346320"/>
+            <a:ext cx="1507320" cy="345960"/>
           </a:xfrm>
           <a:prstGeom prst="rect">
             <a:avLst/>
@@ -8744,7 +8684,7 @@
         <p:spPr>
           <a:xfrm>
             <a:off x="5010840" y="1974960"/>
-            <a:ext cx="3656520" cy="254880"/>
+            <a:ext cx="3656160" cy="254520"/>
           </a:xfrm>
           <a:prstGeom prst="rect">
             <a:avLst/>
@@ -8799,7 +8739,7 @@
         <p:spPr>
           <a:xfrm>
             <a:off x="5010840" y="2231280"/>
-            <a:ext cx="3656520" cy="200160"/>
+            <a:ext cx="3656160" cy="199800"/>
           </a:xfrm>
           <a:prstGeom prst="rect">
             <a:avLst/>
@@ -8854,7 +8794,7 @@
         <p:spPr>
           <a:xfrm>
             <a:off x="4846320" y="2541960"/>
-            <a:ext cx="3821040" cy="803520"/>
+            <a:ext cx="3820680" cy="803160"/>
           </a:xfrm>
           <a:prstGeom prst="rect">
             <a:avLst/>
@@ -8892,7 +8832,7 @@
         <p:spPr>
           <a:xfrm>
             <a:off x="4846320" y="2541960"/>
-            <a:ext cx="72000" cy="803520"/>
+            <a:ext cx="71640" cy="803160"/>
           </a:xfrm>
           <a:prstGeom prst="rect">
             <a:avLst/>
@@ -8923,7 +8863,7 @@
         <p:spPr>
           <a:xfrm>
             <a:off x="5010840" y="2541960"/>
-            <a:ext cx="1507680" cy="346320"/>
+            <a:ext cx="1507320" cy="345960"/>
           </a:xfrm>
           <a:prstGeom prst="rect">
             <a:avLst/>
@@ -8978,7 +8918,7 @@
         <p:spPr>
           <a:xfrm>
             <a:off x="5010840" y="2889360"/>
-            <a:ext cx="3656520" cy="254880"/>
+            <a:ext cx="3656160" cy="254520"/>
           </a:xfrm>
           <a:prstGeom prst="rect">
             <a:avLst/>
@@ -9033,7 +8973,7 @@
         <p:spPr>
           <a:xfrm>
             <a:off x="5010840" y="3145680"/>
-            <a:ext cx="3656520" cy="200160"/>
+            <a:ext cx="3656160" cy="199800"/>
           </a:xfrm>
           <a:prstGeom prst="rect">
             <a:avLst/>
@@ -9088,7 +9028,7 @@
         <p:spPr>
           <a:xfrm>
             <a:off x="320040" y="3429000"/>
-            <a:ext cx="8502840" cy="1535040"/>
+            <a:ext cx="8502480" cy="1534680"/>
           </a:xfrm>
           <a:prstGeom prst="rect">
             <a:avLst/>
@@ -9126,7 +9066,7 @@
         <p:spPr>
           <a:xfrm>
             <a:off x="320040" y="3429000"/>
-            <a:ext cx="8502840" cy="346320"/>
+            <a:ext cx="8502480" cy="345960"/>
           </a:xfrm>
           <a:prstGeom prst="rect">
             <a:avLst/>
@@ -9157,7 +9097,7 @@
         <p:spPr>
           <a:xfrm>
             <a:off x="457200" y="3429000"/>
-            <a:ext cx="8045640" cy="346320"/>
+            <a:ext cx="8045280" cy="345960"/>
           </a:xfrm>
           <a:prstGeom prst="rect">
             <a:avLst/>
@@ -9212,7 +9152,7 @@
         <p:spPr>
           <a:xfrm>
             <a:off x="457200" y="3822120"/>
-            <a:ext cx="2604960" cy="254880"/>
+            <a:ext cx="2604600" cy="254520"/>
           </a:xfrm>
           <a:prstGeom prst="rect">
             <a:avLst/>
@@ -9267,7 +9207,7 @@
         <p:spPr>
           <a:xfrm>
             <a:off x="457200" y="4096440"/>
-            <a:ext cx="2604960" cy="803520"/>
+            <a:ext cx="2604600" cy="803160"/>
           </a:xfrm>
           <a:prstGeom prst="rect">
             <a:avLst/>
@@ -9322,7 +9262,7 @@
         <p:spPr>
           <a:xfrm>
             <a:off x="3291840" y="3822120"/>
-            <a:ext cx="2604960" cy="254880"/>
+            <a:ext cx="2604600" cy="254520"/>
           </a:xfrm>
           <a:prstGeom prst="rect">
             <a:avLst/>
@@ -9377,7 +9317,7 @@
         <p:spPr>
           <a:xfrm>
             <a:off x="3291840" y="4096440"/>
-            <a:ext cx="2604960" cy="803520"/>
+            <a:ext cx="2604600" cy="803160"/>
           </a:xfrm>
           <a:prstGeom prst="rect">
             <a:avLst/>
@@ -9432,7 +9372,7 @@
         <p:spPr>
           <a:xfrm>
             <a:off x="6126480" y="3822120"/>
-            <a:ext cx="2604960" cy="254880"/>
+            <a:ext cx="2604600" cy="254520"/>
           </a:xfrm>
           <a:prstGeom prst="rect">
             <a:avLst/>
@@ -9487,7 +9427,7 @@
         <p:spPr>
           <a:xfrm>
             <a:off x="6126480" y="4096440"/>
-            <a:ext cx="2604960" cy="803520"/>
+            <a:ext cx="2604600" cy="803160"/>
           </a:xfrm>
           <a:prstGeom prst="rect">
             <a:avLst/>
@@ -9542,7 +9482,7 @@
         <p:spPr>
           <a:xfrm>
             <a:off x="320040" y="4773240"/>
-            <a:ext cx="8502840" cy="273240"/>
+            <a:ext cx="8502480" cy="272880"/>
           </a:xfrm>
           <a:prstGeom prst="rect">
             <a:avLst/>
@@ -9580,7 +9520,7 @@
         <p:spPr>
           <a:xfrm>
             <a:off x="320040" y="4773240"/>
-            <a:ext cx="90360" cy="273240"/>
+            <a:ext cx="90000" cy="272880"/>
           </a:xfrm>
           <a:prstGeom prst="rect">
             <a:avLst/>
@@ -9611,7 +9551,7 @@
         <p:spPr>
           <a:xfrm>
             <a:off x="502920" y="4773240"/>
-            <a:ext cx="8228520" cy="273240"/>
+            <a:ext cx="8228160" cy="272880"/>
           </a:xfrm>
           <a:prstGeom prst="rect">
             <a:avLst/>
@@ -9713,7 +9653,7 @@
         <p:spPr>
           <a:xfrm>
             <a:off x="0" y="0"/>
-            <a:ext cx="9142920" cy="1004760"/>
+            <a:ext cx="9142560" cy="1004400"/>
           </a:xfrm>
           <a:prstGeom prst="rect">
             <a:avLst/>
@@ -9744,7 +9684,7 @@
         <p:spPr>
           <a:xfrm>
             <a:off x="0" y="0"/>
-            <a:ext cx="108720" cy="1004760"/>
+            <a:ext cx="108360" cy="1004400"/>
           </a:xfrm>
           <a:prstGeom prst="rect">
             <a:avLst/>
@@ -9775,7 +9715,7 @@
         <p:spPr>
           <a:xfrm>
             <a:off x="255960" y="128160"/>
-            <a:ext cx="8502840" cy="547560"/>
+            <a:ext cx="8502480" cy="547200"/>
           </a:xfrm>
           <a:prstGeom prst="rect">
             <a:avLst/>
@@ -9830,7 +9770,7 @@
         <p:spPr>
           <a:xfrm>
             <a:off x="255960" y="658440"/>
-            <a:ext cx="8502840" cy="273240"/>
+            <a:ext cx="8502480" cy="272880"/>
           </a:xfrm>
           <a:prstGeom prst="rect">
             <a:avLst/>
@@ -9885,7 +9825,7 @@
         <p:spPr>
           <a:xfrm>
             <a:off x="320040" y="1143000"/>
-            <a:ext cx="4205160" cy="3930840"/>
+            <a:ext cx="4204800" cy="3930480"/>
           </a:xfrm>
           <a:prstGeom prst="rect">
             <a:avLst/>
@@ -9923,7 +9863,7 @@
         <p:spPr>
           <a:xfrm>
             <a:off x="365760" y="1188720"/>
-            <a:ext cx="4113720" cy="3857760"/>
+            <a:ext cx="4113360" cy="3857400"/>
           </a:xfrm>
           <a:prstGeom prst="rect">
             <a:avLst/>
@@ -9954,7 +9894,7 @@
         <p:spPr>
           <a:xfrm>
             <a:off x="365760" y="1188720"/>
-            <a:ext cx="565920" cy="200160"/>
+            <a:ext cx="565560" cy="199800"/>
           </a:xfrm>
           <a:prstGeom prst="rect">
             <a:avLst/>
@@ -9985,7 +9925,7 @@
         <p:spPr>
           <a:xfrm>
             <a:off x="365760" y="1188720"/>
-            <a:ext cx="565920" cy="200160"/>
+            <a:ext cx="565560" cy="199800"/>
           </a:xfrm>
           <a:prstGeom prst="rect">
             <a:avLst/>
@@ -10040,7 +9980,7 @@
         <p:spPr>
           <a:xfrm>
             <a:off x="457200" y="1426320"/>
-            <a:ext cx="3930840" cy="3583440"/>
+            <a:ext cx="3930480" cy="3583080"/>
           </a:xfrm>
           <a:prstGeom prst="rect">
             <a:avLst/>
@@ -10885,7 +10825,7 @@
         <p:spPr>
           <a:xfrm>
             <a:off x="4709160" y="1143000"/>
-            <a:ext cx="4113720" cy="3930840"/>
+            <a:ext cx="4113360" cy="3930480"/>
           </a:xfrm>
           <a:prstGeom prst="rect">
             <a:avLst/>
@@ -10923,7 +10863,7 @@
         <p:spPr>
           <a:xfrm>
             <a:off x="4754880" y="1188720"/>
-            <a:ext cx="4113720" cy="3857760"/>
+            <a:ext cx="4113360" cy="3857400"/>
           </a:xfrm>
           <a:prstGeom prst="rect">
             <a:avLst/>
@@ -10954,7 +10894,7 @@
         <p:spPr>
           <a:xfrm>
             <a:off x="4754880" y="1188720"/>
-            <a:ext cx="565920" cy="200160"/>
+            <a:ext cx="565560" cy="199800"/>
           </a:xfrm>
           <a:prstGeom prst="rect">
             <a:avLst/>
@@ -10985,7 +10925,7 @@
         <p:spPr>
           <a:xfrm>
             <a:off x="4754880" y="1188720"/>
-            <a:ext cx="565920" cy="200160"/>
+            <a:ext cx="565560" cy="199800"/>
           </a:xfrm>
           <a:prstGeom prst="rect">
             <a:avLst/>
@@ -11040,7 +10980,7 @@
         <p:spPr>
           <a:xfrm>
             <a:off x="4846320" y="1426320"/>
-            <a:ext cx="3930840" cy="3583440"/>
+            <a:ext cx="3930480" cy="3583080"/>
           </a:xfrm>
           <a:prstGeom prst="rect">
             <a:avLst/>
@@ -11876,7 +11816,7 @@
         <p:spPr>
           <a:xfrm>
             <a:off x="0" y="0"/>
-            <a:ext cx="9142920" cy="1004760"/>
+            <a:ext cx="9142560" cy="1004400"/>
           </a:xfrm>
           <a:prstGeom prst="rect">
             <a:avLst/>
@@ -11907,7 +11847,7 @@
         <p:spPr>
           <a:xfrm>
             <a:off x="0" y="0"/>
-            <a:ext cx="108720" cy="1004760"/>
+            <a:ext cx="108360" cy="1004400"/>
           </a:xfrm>
           <a:prstGeom prst="rect">
             <a:avLst/>
@@ -11938,7 +11878,7 @@
         <p:spPr>
           <a:xfrm>
             <a:off x="255960" y="128160"/>
-            <a:ext cx="8502840" cy="547560"/>
+            <a:ext cx="8502480" cy="547200"/>
           </a:xfrm>
           <a:prstGeom prst="rect">
             <a:avLst/>
@@ -11993,7 +11933,7 @@
         <p:spPr>
           <a:xfrm>
             <a:off x="255960" y="658440"/>
-            <a:ext cx="8502840" cy="273240"/>
+            <a:ext cx="8502480" cy="272880"/>
           </a:xfrm>
           <a:prstGeom prst="rect">
             <a:avLst/>
@@ -12048,7 +11988,7 @@
         <p:spPr>
           <a:xfrm>
             <a:off x="320040" y="1143000"/>
-            <a:ext cx="8502840" cy="364680"/>
+            <a:ext cx="8502480" cy="364320"/>
           </a:xfrm>
           <a:prstGeom prst="rect">
             <a:avLst/>
@@ -12079,7 +12019,7 @@
         <p:spPr>
           <a:xfrm>
             <a:off x="457200" y="1143000"/>
-            <a:ext cx="3290760" cy="364680"/>
+            <a:ext cx="3290400" cy="364320"/>
           </a:xfrm>
           <a:prstGeom prst="rect">
             <a:avLst/>
@@ -12134,7 +12074,7 @@
         <p:spPr>
           <a:xfrm>
             <a:off x="3749040" y="1143000"/>
-            <a:ext cx="1096200" cy="364680"/>
+            <a:ext cx="1095840" cy="364320"/>
           </a:xfrm>
           <a:prstGeom prst="rect">
             <a:avLst/>
@@ -12189,7 +12129,7 @@
         <p:spPr>
           <a:xfrm>
             <a:off x="4846320" y="1143000"/>
-            <a:ext cx="3930840" cy="364680"/>
+            <a:ext cx="3930480" cy="364320"/>
           </a:xfrm>
           <a:prstGeom prst="rect">
             <a:avLst/>
@@ -12244,7 +12184,7 @@
         <p:spPr>
           <a:xfrm>
             <a:off x="320040" y="1554480"/>
-            <a:ext cx="8502840" cy="428760"/>
+            <a:ext cx="8502480" cy="428400"/>
           </a:xfrm>
           <a:prstGeom prst="rect">
             <a:avLst/>
@@ -12282,7 +12222,7 @@
         <p:spPr>
           <a:xfrm>
             <a:off x="320040" y="1554480"/>
-            <a:ext cx="72000" cy="456120"/>
+            <a:ext cx="71640" cy="455760"/>
           </a:xfrm>
           <a:prstGeom prst="rect">
             <a:avLst/>
@@ -12313,7 +12253,7 @@
         <p:spPr>
           <a:xfrm>
             <a:off x="457200" y="1554480"/>
-            <a:ext cx="3245040" cy="456120"/>
+            <a:ext cx="3244680" cy="455760"/>
           </a:xfrm>
           <a:prstGeom prst="rect">
             <a:avLst/>
@@ -12368,7 +12308,7 @@
         <p:spPr>
           <a:xfrm>
             <a:off x="3749040" y="1554480"/>
-            <a:ext cx="1050480" cy="456120"/>
+            <a:ext cx="1050120" cy="455760"/>
           </a:xfrm>
           <a:prstGeom prst="rect">
             <a:avLst/>
@@ -12423,7 +12363,7 @@
         <p:spPr>
           <a:xfrm>
             <a:off x="4846320" y="1554480"/>
-            <a:ext cx="3885120" cy="456120"/>
+            <a:ext cx="3884760" cy="455760"/>
           </a:xfrm>
           <a:prstGeom prst="rect">
             <a:avLst/>
@@ -12478,7 +12418,7 @@
         <p:spPr>
           <a:xfrm>
             <a:off x="320040" y="2030040"/>
-            <a:ext cx="8502840" cy="428760"/>
+            <a:ext cx="8502480" cy="428400"/>
           </a:xfrm>
           <a:prstGeom prst="rect">
             <a:avLst/>
@@ -12516,7 +12456,7 @@
         <p:spPr>
           <a:xfrm>
             <a:off x="320040" y="2030040"/>
-            <a:ext cx="72000" cy="456120"/>
+            <a:ext cx="71640" cy="455760"/>
           </a:xfrm>
           <a:prstGeom prst="rect">
             <a:avLst/>
@@ -12547,7 +12487,7 @@
         <p:spPr>
           <a:xfrm>
             <a:off x="457200" y="2030040"/>
-            <a:ext cx="3245040" cy="456120"/>
+            <a:ext cx="3244680" cy="455760"/>
           </a:xfrm>
           <a:prstGeom prst="rect">
             <a:avLst/>
@@ -12602,7 +12542,7 @@
         <p:spPr>
           <a:xfrm>
             <a:off x="3749040" y="2030040"/>
-            <a:ext cx="1050480" cy="456120"/>
+            <a:ext cx="1050120" cy="455760"/>
           </a:xfrm>
           <a:prstGeom prst="rect">
             <a:avLst/>
@@ -12657,7 +12597,7 @@
         <p:spPr>
           <a:xfrm>
             <a:off x="4846320" y="2030040"/>
-            <a:ext cx="3885120" cy="456120"/>
+            <a:ext cx="3884760" cy="455760"/>
           </a:xfrm>
           <a:prstGeom prst="rect">
             <a:avLst/>
@@ -12712,7 +12652,7 @@
         <p:spPr>
           <a:xfrm>
             <a:off x="320040" y="2505600"/>
-            <a:ext cx="8502840" cy="428760"/>
+            <a:ext cx="8502480" cy="428400"/>
           </a:xfrm>
           <a:prstGeom prst="rect">
             <a:avLst/>
@@ -12750,7 +12690,7 @@
         <p:spPr>
           <a:xfrm>
             <a:off x="320040" y="2505600"/>
-            <a:ext cx="72000" cy="456120"/>
+            <a:ext cx="71640" cy="455760"/>
           </a:xfrm>
           <a:prstGeom prst="rect">
             <a:avLst/>
@@ -12781,7 +12721,7 @@
         <p:spPr>
           <a:xfrm>
             <a:off x="457200" y="2505600"/>
-            <a:ext cx="3245040" cy="456120"/>
+            <a:ext cx="3244680" cy="455760"/>
           </a:xfrm>
           <a:prstGeom prst="rect">
             <a:avLst/>
@@ -12836,7 +12776,7 @@
         <p:spPr>
           <a:xfrm>
             <a:off x="3749040" y="2505600"/>
-            <a:ext cx="1050480" cy="456120"/>
+            <a:ext cx="1050120" cy="455760"/>
           </a:xfrm>
           <a:prstGeom prst="rect">
             <a:avLst/>
@@ -12891,7 +12831,7 @@
         <p:spPr>
           <a:xfrm>
             <a:off x="4846320" y="2505600"/>
-            <a:ext cx="3885120" cy="456120"/>
+            <a:ext cx="3884760" cy="455760"/>
           </a:xfrm>
           <a:prstGeom prst="rect">
             <a:avLst/>
@@ -12946,7 +12886,7 @@
         <p:spPr>
           <a:xfrm>
             <a:off x="320040" y="2980800"/>
-            <a:ext cx="8502840" cy="428760"/>
+            <a:ext cx="8502480" cy="428400"/>
           </a:xfrm>
           <a:prstGeom prst="rect">
             <a:avLst/>
@@ -12984,7 +12924,7 @@
         <p:spPr>
           <a:xfrm>
             <a:off x="320040" y="2980800"/>
-            <a:ext cx="72000" cy="456120"/>
+            <a:ext cx="71640" cy="455760"/>
           </a:xfrm>
           <a:prstGeom prst="rect">
             <a:avLst/>
@@ -13015,7 +12955,7 @@
         <p:spPr>
           <a:xfrm>
             <a:off x="457200" y="2980800"/>
-            <a:ext cx="3245040" cy="456120"/>
+            <a:ext cx="3244680" cy="455760"/>
           </a:xfrm>
           <a:prstGeom prst="rect">
             <a:avLst/>
@@ -13070,7 +13010,7 @@
         <p:spPr>
           <a:xfrm>
             <a:off x="3749040" y="2980800"/>
-            <a:ext cx="1050480" cy="456120"/>
+            <a:ext cx="1050120" cy="455760"/>
           </a:xfrm>
           <a:prstGeom prst="rect">
             <a:avLst/>
@@ -13135,7 +13075,7 @@
         <p:spPr>
           <a:xfrm>
             <a:off x="4846320" y="2980800"/>
-            <a:ext cx="3885120" cy="456120"/>
+            <a:ext cx="3884760" cy="455760"/>
           </a:xfrm>
           <a:prstGeom prst="rect">
             <a:avLst/>
@@ -13190,7 +13130,7 @@
         <p:spPr>
           <a:xfrm>
             <a:off x="320040" y="3456360"/>
-            <a:ext cx="8502840" cy="428760"/>
+            <a:ext cx="8502480" cy="428400"/>
           </a:xfrm>
           <a:prstGeom prst="rect">
             <a:avLst/>
@@ -13228,7 +13168,7 @@
         <p:spPr>
           <a:xfrm>
             <a:off x="320040" y="3456360"/>
-            <a:ext cx="72000" cy="456120"/>
+            <a:ext cx="71640" cy="455760"/>
           </a:xfrm>
           <a:prstGeom prst="rect">
             <a:avLst/>
@@ -13259,7 +13199,7 @@
         <p:spPr>
           <a:xfrm>
             <a:off x="457200" y="3456360"/>
-            <a:ext cx="3245040" cy="456120"/>
+            <a:ext cx="3244680" cy="455760"/>
           </a:xfrm>
           <a:prstGeom prst="rect">
             <a:avLst/>
@@ -13314,7 +13254,7 @@
         <p:spPr>
           <a:xfrm>
             <a:off x="3749040" y="3456360"/>
-            <a:ext cx="1050480" cy="456120"/>
+            <a:ext cx="1050120" cy="455760"/>
           </a:xfrm>
           <a:prstGeom prst="rect">
             <a:avLst/>
@@ -13369,7 +13309,7 @@
         <p:spPr>
           <a:xfrm>
             <a:off x="4846320" y="3456360"/>
-            <a:ext cx="3885120" cy="456120"/>
+            <a:ext cx="3884760" cy="455760"/>
           </a:xfrm>
           <a:prstGeom prst="rect">
             <a:avLst/>
@@ -13424,7 +13364,7 @@
         <p:spPr>
           <a:xfrm>
             <a:off x="320040" y="3931920"/>
-            <a:ext cx="8502840" cy="428760"/>
+            <a:ext cx="8502480" cy="428400"/>
           </a:xfrm>
           <a:prstGeom prst="rect">
             <a:avLst/>
@@ -13462,7 +13402,7 @@
         <p:spPr>
           <a:xfrm>
             <a:off x="320040" y="3931920"/>
-            <a:ext cx="72000" cy="456120"/>
+            <a:ext cx="71640" cy="455760"/>
           </a:xfrm>
           <a:prstGeom prst="rect">
             <a:avLst/>
@@ -13493,7 +13433,7 @@
         <p:spPr>
           <a:xfrm>
             <a:off x="457200" y="3931920"/>
-            <a:ext cx="3245040" cy="456120"/>
+            <a:ext cx="3244680" cy="455760"/>
           </a:xfrm>
           <a:prstGeom prst="rect">
             <a:avLst/>
@@ -13548,7 +13488,7 @@
         <p:spPr>
           <a:xfrm>
             <a:off x="3749040" y="3931920"/>
-            <a:ext cx="1050480" cy="456120"/>
+            <a:ext cx="1050120" cy="455760"/>
           </a:xfrm>
           <a:prstGeom prst="rect">
             <a:avLst/>
@@ -13603,7 +13543,7 @@
         <p:spPr>
           <a:xfrm>
             <a:off x="4846320" y="3931920"/>
-            <a:ext cx="3885120" cy="456120"/>
+            <a:ext cx="3884760" cy="455760"/>
           </a:xfrm>
           <a:prstGeom prst="rect">
             <a:avLst/>
@@ -13658,7 +13598,7 @@
         <p:spPr>
           <a:xfrm>
             <a:off x="320040" y="4407480"/>
-            <a:ext cx="8502840" cy="428760"/>
+            <a:ext cx="8502480" cy="428400"/>
           </a:xfrm>
           <a:prstGeom prst="rect">
             <a:avLst/>
@@ -13696,7 +13636,7 @@
         <p:spPr>
           <a:xfrm>
             <a:off x="320040" y="4407480"/>
-            <a:ext cx="72000" cy="456120"/>
+            <a:ext cx="71640" cy="455760"/>
           </a:xfrm>
           <a:prstGeom prst="rect">
             <a:avLst/>
@@ -13727,7 +13667,7 @@
         <p:spPr>
           <a:xfrm>
             <a:off x="457200" y="4407480"/>
-            <a:ext cx="3245040" cy="456120"/>
+            <a:ext cx="3244680" cy="455760"/>
           </a:xfrm>
           <a:prstGeom prst="rect">
             <a:avLst/>
@@ -13782,7 +13722,7 @@
         <p:spPr>
           <a:xfrm>
             <a:off x="3749040" y="4407480"/>
-            <a:ext cx="1050480" cy="456120"/>
+            <a:ext cx="1050120" cy="455760"/>
           </a:xfrm>
           <a:prstGeom prst="rect">
             <a:avLst/>
@@ -13837,7 +13777,7 @@
         <p:spPr>
           <a:xfrm>
             <a:off x="4846320" y="4407480"/>
-            <a:ext cx="3885120" cy="456120"/>
+            <a:ext cx="3884760" cy="455760"/>
           </a:xfrm>
           <a:prstGeom prst="rect">
             <a:avLst/>
@@ -13892,7 +13832,7 @@
         <p:spPr>
           <a:xfrm>
             <a:off x="320040" y="4773240"/>
-            <a:ext cx="8502840" cy="273240"/>
+            <a:ext cx="8502480" cy="272880"/>
           </a:xfrm>
           <a:prstGeom prst="rect">
             <a:avLst/>
@@ -13930,7 +13870,7 @@
         <p:spPr>
           <a:xfrm>
             <a:off x="320040" y="4773240"/>
-            <a:ext cx="90360" cy="273240"/>
+            <a:ext cx="90000" cy="272880"/>
           </a:xfrm>
           <a:prstGeom prst="rect">
             <a:avLst/>
@@ -13961,7 +13901,7 @@
         <p:spPr>
           <a:xfrm>
             <a:off x="502920" y="4773240"/>
-            <a:ext cx="8228520" cy="273240"/>
+            <a:ext cx="8228160" cy="272880"/>
           </a:xfrm>
           <a:prstGeom prst="rect">
             <a:avLst/>
@@ -14063,7 +14003,7 @@
         <p:spPr>
           <a:xfrm>
             <a:off x="0" y="0"/>
-            <a:ext cx="9142920" cy="1004760"/>
+            <a:ext cx="9142560" cy="1004400"/>
           </a:xfrm>
           <a:prstGeom prst="rect">
             <a:avLst/>
@@ -14094,7 +14034,7 @@
         <p:spPr>
           <a:xfrm>
             <a:off x="0" y="0"/>
-            <a:ext cx="108720" cy="1004760"/>
+            <a:ext cx="108360" cy="1004400"/>
           </a:xfrm>
           <a:prstGeom prst="rect">
             <a:avLst/>
@@ -14125,7 +14065,7 @@
         <p:spPr>
           <a:xfrm>
             <a:off x="255960" y="128160"/>
-            <a:ext cx="8502840" cy="547560"/>
+            <a:ext cx="8502480" cy="547200"/>
           </a:xfrm>
           <a:prstGeom prst="rect">
             <a:avLst/>
@@ -14180,7 +14120,7 @@
         <p:spPr>
           <a:xfrm>
             <a:off x="255960" y="658440"/>
-            <a:ext cx="8502840" cy="273240"/>
+            <a:ext cx="8502480" cy="272880"/>
           </a:xfrm>
           <a:prstGeom prst="rect">
             <a:avLst/>
@@ -14235,7 +14175,7 @@
         <p:spPr>
           <a:xfrm>
             <a:off x="320040" y="1143000"/>
-            <a:ext cx="8502840" cy="1535040"/>
+            <a:ext cx="8502480" cy="1534680"/>
           </a:xfrm>
           <a:prstGeom prst="rect">
             <a:avLst/>
@@ -14273,7 +14213,7 @@
         <p:spPr>
           <a:xfrm>
             <a:off x="457200" y="1234440"/>
-            <a:ext cx="8045640" cy="254880"/>
+            <a:ext cx="8045280" cy="254520"/>
           </a:xfrm>
           <a:prstGeom prst="rect">
             <a:avLst/>
@@ -14328,7 +14268,7 @@
         <p:spPr>
           <a:xfrm>
             <a:off x="365760" y="1517760"/>
-            <a:ext cx="8453880" cy="1181880"/>
+            <a:ext cx="8453520" cy="1181520"/>
           </a:xfrm>
           <a:prstGeom prst="rect">
             <a:avLst/>
@@ -14359,7 +14299,7 @@
         <p:spPr>
           <a:xfrm>
             <a:off x="365760" y="1517760"/>
-            <a:ext cx="565920" cy="200160"/>
+            <a:ext cx="565560" cy="199800"/>
           </a:xfrm>
           <a:prstGeom prst="rect">
             <a:avLst/>
@@ -14390,7 +14330,7 @@
         <p:spPr>
           <a:xfrm>
             <a:off x="365760" y="1517760"/>
-            <a:ext cx="565920" cy="200160"/>
+            <a:ext cx="565560" cy="199800"/>
           </a:xfrm>
           <a:prstGeom prst="rect">
             <a:avLst/>
@@ -14445,7 +14385,7 @@
         <p:spPr>
           <a:xfrm>
             <a:off x="457200" y="1774080"/>
-            <a:ext cx="8362440" cy="925560"/>
+            <a:ext cx="8362080" cy="925200"/>
           </a:xfrm>
           <a:prstGeom prst="rect">
             <a:avLst/>
@@ -14596,7 +14536,7 @@
         <p:spPr>
           <a:xfrm>
             <a:off x="320040" y="2788920"/>
-            <a:ext cx="2742120" cy="1992240"/>
+            <a:ext cx="2741760" cy="1991880"/>
           </a:xfrm>
           <a:prstGeom prst="rect">
             <a:avLst/>
@@ -14634,7 +14574,7 @@
         <p:spPr>
           <a:xfrm>
             <a:off x="320040" y="2788920"/>
-            <a:ext cx="2742120" cy="346320"/>
+            <a:ext cx="2741760" cy="345960"/>
           </a:xfrm>
           <a:prstGeom prst="rect">
             <a:avLst/>
@@ -14665,7 +14605,7 @@
         <p:spPr>
           <a:xfrm>
             <a:off x="457200" y="2788920"/>
-            <a:ext cx="2467800" cy="346320"/>
+            <a:ext cx="2467440" cy="345960"/>
           </a:xfrm>
           <a:prstGeom prst="rect">
             <a:avLst/>
@@ -14720,7 +14660,7 @@
         <p:spPr>
           <a:xfrm>
             <a:off x="457200" y="3200400"/>
-            <a:ext cx="2486160" cy="1480320"/>
+            <a:ext cx="2485800" cy="1479960"/>
           </a:xfrm>
           <a:prstGeom prst="rect">
             <a:avLst/>
@@ -14775,7 +14715,7 @@
         <p:spPr>
           <a:xfrm>
             <a:off x="3227760" y="2788920"/>
-            <a:ext cx="2742120" cy="1992240"/>
+            <a:ext cx="2741760" cy="1991880"/>
           </a:xfrm>
           <a:prstGeom prst="rect">
             <a:avLst/>
@@ -14813,7 +14753,7 @@
         <p:spPr>
           <a:xfrm>
             <a:off x="3227760" y="2788920"/>
-            <a:ext cx="2742120" cy="346320"/>
+            <a:ext cx="2741760" cy="345960"/>
           </a:xfrm>
           <a:prstGeom prst="rect">
             <a:avLst/>
@@ -14844,7 +14784,7 @@
         <p:spPr>
           <a:xfrm>
             <a:off x="3364920" y="2788920"/>
-            <a:ext cx="2467800" cy="346320"/>
+            <a:ext cx="2467440" cy="345960"/>
           </a:xfrm>
           <a:prstGeom prst="rect">
             <a:avLst/>
@@ -14899,7 +14839,7 @@
         <p:spPr>
           <a:xfrm>
             <a:off x="3364920" y="3200400"/>
-            <a:ext cx="2486160" cy="1480320"/>
+            <a:ext cx="2485800" cy="1479960"/>
           </a:xfrm>
           <a:prstGeom prst="rect">
             <a:avLst/>
@@ -14954,7 +14894,7 @@
         <p:spPr>
           <a:xfrm>
             <a:off x="6135480" y="2788920"/>
-            <a:ext cx="2742120" cy="1992240"/>
+            <a:ext cx="2741760" cy="1991880"/>
           </a:xfrm>
           <a:prstGeom prst="rect">
             <a:avLst/>
@@ -14992,7 +14932,7 @@
         <p:spPr>
           <a:xfrm>
             <a:off x="6135480" y="2788920"/>
-            <a:ext cx="2742120" cy="346320"/>
+            <a:ext cx="2741760" cy="345960"/>
           </a:xfrm>
           <a:prstGeom prst="rect">
             <a:avLst/>
@@ -15023,7 +14963,7 @@
         <p:spPr>
           <a:xfrm>
             <a:off x="6272640" y="2788920"/>
-            <a:ext cx="2467800" cy="346320"/>
+            <a:ext cx="2467440" cy="345960"/>
           </a:xfrm>
           <a:prstGeom prst="rect">
             <a:avLst/>
@@ -15078,7 +15018,7 @@
         <p:spPr>
           <a:xfrm>
             <a:off x="6272640" y="3200400"/>
-            <a:ext cx="2486160" cy="1480320"/>
+            <a:ext cx="2485800" cy="1479960"/>
           </a:xfrm>
           <a:prstGeom prst="rect">
             <a:avLst/>
@@ -15133,7 +15073,7 @@
         <p:spPr>
           <a:xfrm>
             <a:off x="320040" y="4864680"/>
-            <a:ext cx="8502840" cy="227520"/>
+            <a:ext cx="8502480" cy="227160"/>
           </a:xfrm>
           <a:prstGeom prst="rect">
             <a:avLst/>
@@ -15171,7 +15111,7 @@
         <p:spPr>
           <a:xfrm>
             <a:off x="457200" y="4864680"/>
-            <a:ext cx="8228520" cy="227520"/>
+            <a:ext cx="8228160" cy="227160"/>
           </a:xfrm>
           <a:prstGeom prst="rect">
             <a:avLst/>
@@ -15263,7 +15203,7 @@
         <p:spPr>
           <a:xfrm>
             <a:off x="0" y="0"/>
-            <a:ext cx="9142920" cy="1004760"/>
+            <a:ext cx="9142560" cy="1004400"/>
           </a:xfrm>
           <a:prstGeom prst="rect">
             <a:avLst/>
@@ -15294,7 +15234,7 @@
         <p:spPr>
           <a:xfrm>
             <a:off x="0" y="0"/>
-            <a:ext cx="108720" cy="1004760"/>
+            <a:ext cx="108360" cy="1004400"/>
           </a:xfrm>
           <a:prstGeom prst="rect">
             <a:avLst/>
@@ -15325,7 +15265,7 @@
         <p:spPr>
           <a:xfrm>
             <a:off x="255960" y="128160"/>
-            <a:ext cx="8502840" cy="547560"/>
+            <a:ext cx="8502480" cy="547200"/>
           </a:xfrm>
           <a:prstGeom prst="rect">
             <a:avLst/>
@@ -15380,7 +15320,7 @@
         <p:spPr>
           <a:xfrm>
             <a:off x="255960" y="658440"/>
-            <a:ext cx="8502840" cy="273240"/>
+            <a:ext cx="8502480" cy="272880"/>
           </a:xfrm>
           <a:prstGeom prst="rect">
             <a:avLst/>
@@ -15435,7 +15375,7 @@
         <p:spPr>
           <a:xfrm>
             <a:off x="320040" y="1143000"/>
-            <a:ext cx="8502840" cy="840240"/>
+            <a:ext cx="8502480" cy="839880"/>
           </a:xfrm>
           <a:prstGeom prst="rect">
             <a:avLst/>
@@ -15473,7 +15413,7 @@
         <p:spPr>
           <a:xfrm>
             <a:off x="320040" y="1143000"/>
-            <a:ext cx="8502840" cy="72000"/>
+            <a:ext cx="8502480" cy="71640"/>
           </a:xfrm>
           <a:prstGeom prst="rect">
             <a:avLst/>
@@ -15504,7 +15444,7 @@
         <p:spPr>
           <a:xfrm>
             <a:off x="457200" y="1261800"/>
-            <a:ext cx="8228520" cy="657360"/>
+            <a:ext cx="8228160" cy="657000"/>
           </a:xfrm>
           <a:prstGeom prst="rect">
             <a:avLst/>
@@ -15559,7 +15499,7 @@
         <p:spPr>
           <a:xfrm>
             <a:off x="320040" y="2084760"/>
-            <a:ext cx="8502840" cy="803520"/>
+            <a:ext cx="8502480" cy="803160"/>
           </a:xfrm>
           <a:prstGeom prst="rect">
             <a:avLst/>
@@ -15597,7 +15537,7 @@
         <p:spPr>
           <a:xfrm>
             <a:off x="320040" y="1980000"/>
-            <a:ext cx="8499600" cy="539640"/>
+            <a:ext cx="8499240" cy="539280"/>
           </a:xfrm>
           <a:prstGeom prst="rect">
             <a:avLst/>
@@ -15628,7 +15568,7 @@
         <p:spPr>
           <a:xfrm>
             <a:off x="457200" y="2084760"/>
-            <a:ext cx="2559240" cy="346320"/>
+            <a:ext cx="2558880" cy="345960"/>
           </a:xfrm>
           <a:prstGeom prst="rect">
             <a:avLst/>
@@ -15683,7 +15623,7 @@
         <p:spPr>
           <a:xfrm>
             <a:off x="3017520" y="2084760"/>
-            <a:ext cx="5802120" cy="254880"/>
+            <a:ext cx="5801760" cy="254520"/>
           </a:xfrm>
           <a:prstGeom prst="rect">
             <a:avLst/>
@@ -15738,7 +15678,7 @@
         <p:spPr>
           <a:xfrm>
             <a:off x="457200" y="2450520"/>
-            <a:ext cx="8228520" cy="401400"/>
+            <a:ext cx="8228160" cy="401040"/>
           </a:xfrm>
           <a:prstGeom prst="rect">
             <a:avLst/>
@@ -15793,7 +15733,7 @@
         <p:spPr>
           <a:xfrm>
             <a:off x="320040" y="2999160"/>
-            <a:ext cx="8502840" cy="1736280"/>
+            <a:ext cx="8502480" cy="1735920"/>
           </a:xfrm>
           <a:prstGeom prst="rect">
             <a:avLst/>
@@ -15831,7 +15771,7 @@
         <p:spPr>
           <a:xfrm>
             <a:off x="320040" y="2999160"/>
-            <a:ext cx="8502840" cy="346320"/>
+            <a:ext cx="8502480" cy="345960"/>
           </a:xfrm>
           <a:prstGeom prst="rect">
             <a:avLst/>
@@ -15862,7 +15802,7 @@
         <p:spPr>
           <a:xfrm>
             <a:off x="457200" y="2999160"/>
-            <a:ext cx="8045640" cy="346320"/>
+            <a:ext cx="8045280" cy="345960"/>
           </a:xfrm>
           <a:prstGeom prst="rect">
             <a:avLst/>
@@ -15917,7 +15857,7 @@
         <p:spPr>
           <a:xfrm>
             <a:off x="438840" y="3401640"/>
-            <a:ext cx="2028960" cy="1260720"/>
+            <a:ext cx="2028600" cy="1260360"/>
           </a:xfrm>
           <a:prstGeom prst="rect">
             <a:avLst/>
@@ -15955,7 +15895,7 @@
         <p:spPr>
           <a:xfrm>
             <a:off x="438840" y="3401640"/>
-            <a:ext cx="2028960" cy="63000"/>
+            <a:ext cx="2028600" cy="62640"/>
           </a:xfrm>
           <a:prstGeom prst="rect">
             <a:avLst/>
@@ -15986,7 +15926,7 @@
         <p:spPr>
           <a:xfrm>
             <a:off x="530280" y="3493080"/>
-            <a:ext cx="1846080" cy="346320"/>
+            <a:ext cx="1845720" cy="345960"/>
           </a:xfrm>
           <a:prstGeom prst="rect">
             <a:avLst/>
@@ -16041,7 +15981,7 @@
         <p:spPr>
           <a:xfrm>
             <a:off x="530280" y="3858840"/>
-            <a:ext cx="1846080" cy="730440"/>
+            <a:ext cx="1845720" cy="730080"/>
           </a:xfrm>
           <a:prstGeom prst="rect">
             <a:avLst/>
@@ -16096,7 +16036,7 @@
         <p:spPr>
           <a:xfrm>
             <a:off x="2615040" y="3401640"/>
-            <a:ext cx="2028960" cy="1260720"/>
+            <a:ext cx="2028600" cy="1260360"/>
           </a:xfrm>
           <a:prstGeom prst="rect">
             <a:avLst/>
@@ -16134,7 +16074,7 @@
         <p:spPr>
           <a:xfrm>
             <a:off x="2615040" y="3401640"/>
-            <a:ext cx="2028960" cy="63000"/>
+            <a:ext cx="2028600" cy="62640"/>
           </a:xfrm>
           <a:prstGeom prst="rect">
             <a:avLst/>
@@ -16165,7 +16105,7 @@
         <p:spPr>
           <a:xfrm>
             <a:off x="2706480" y="3493080"/>
-            <a:ext cx="1846080" cy="346320"/>
+            <a:ext cx="1845720" cy="345960"/>
           </a:xfrm>
           <a:prstGeom prst="rect">
             <a:avLst/>
@@ -16220,7 +16160,7 @@
         <p:spPr>
           <a:xfrm>
             <a:off x="2706480" y="3858840"/>
-            <a:ext cx="1846080" cy="730440"/>
+            <a:ext cx="1845720" cy="730080"/>
           </a:xfrm>
           <a:prstGeom prst="rect">
             <a:avLst/>
@@ -16275,7 +16215,7 @@
         <p:spPr>
           <a:xfrm>
             <a:off x="4791600" y="3401640"/>
-            <a:ext cx="2028960" cy="1260720"/>
+            <a:ext cx="2028600" cy="1260360"/>
           </a:xfrm>
           <a:prstGeom prst="rect">
             <a:avLst/>
@@ -16313,7 +16253,7 @@
         <p:spPr>
           <a:xfrm>
             <a:off x="4791600" y="3401640"/>
-            <a:ext cx="2028960" cy="63000"/>
+            <a:ext cx="2028600" cy="62640"/>
           </a:xfrm>
           <a:prstGeom prst="rect">
             <a:avLst/>
@@ -16344,7 +16284,7 @@
         <p:spPr>
           <a:xfrm>
             <a:off x="4883040" y="3493080"/>
-            <a:ext cx="1846080" cy="346320"/>
+            <a:ext cx="1845720" cy="345960"/>
           </a:xfrm>
           <a:prstGeom prst="rect">
             <a:avLst/>
@@ -16399,7 +16339,7 @@
         <p:spPr>
           <a:xfrm>
             <a:off x="4883040" y="3858840"/>
-            <a:ext cx="1846080" cy="730440"/>
+            <a:ext cx="1845720" cy="730080"/>
           </a:xfrm>
           <a:prstGeom prst="rect">
             <a:avLst/>
@@ -16454,7 +16394,7 @@
         <p:spPr>
           <a:xfrm>
             <a:off x="6967800" y="3401640"/>
-            <a:ext cx="2028960" cy="1260720"/>
+            <a:ext cx="2028600" cy="1260360"/>
           </a:xfrm>
           <a:prstGeom prst="rect">
             <a:avLst/>
@@ -16492,7 +16432,7 @@
         <p:spPr>
           <a:xfrm>
             <a:off x="6967800" y="3401640"/>
-            <a:ext cx="2028960" cy="63000"/>
+            <a:ext cx="2028600" cy="62640"/>
           </a:xfrm>
           <a:prstGeom prst="rect">
             <a:avLst/>
@@ -16523,7 +16463,7 @@
         <p:spPr>
           <a:xfrm>
             <a:off x="7059240" y="3493080"/>
-            <a:ext cx="1846080" cy="346320"/>
+            <a:ext cx="1845720" cy="345960"/>
           </a:xfrm>
           <a:prstGeom prst="rect">
             <a:avLst/>
@@ -16578,7 +16518,7 @@
         <p:spPr>
           <a:xfrm>
             <a:off x="7059240" y="3858840"/>
-            <a:ext cx="1846080" cy="730440"/>
+            <a:ext cx="1845720" cy="730080"/>
           </a:xfrm>
           <a:prstGeom prst="rect">
             <a:avLst/>
@@ -16633,7 +16573,7 @@
         <p:spPr>
           <a:xfrm>
             <a:off x="320040" y="4773240"/>
-            <a:ext cx="8502840" cy="273240"/>
+            <a:ext cx="8502480" cy="272880"/>
           </a:xfrm>
           <a:prstGeom prst="rect">
             <a:avLst/>
@@ -16671,7 +16611,7 @@
         <p:spPr>
           <a:xfrm>
             <a:off x="320040" y="4773240"/>
-            <a:ext cx="90360" cy="273240"/>
+            <a:ext cx="90000" cy="272880"/>
           </a:xfrm>
           <a:prstGeom prst="rect">
             <a:avLst/>
@@ -16702,7 +16642,7 @@
         <p:spPr>
           <a:xfrm>
             <a:off x="502920" y="4773240"/>
-            <a:ext cx="8228520" cy="273240"/>
+            <a:ext cx="8228160" cy="272880"/>
           </a:xfrm>
           <a:prstGeom prst="rect">
             <a:avLst/>
@@ -16804,7 +16744,7 @@
         <p:spPr>
           <a:xfrm>
             <a:off x="0" y="0"/>
-            <a:ext cx="9142920" cy="1004760"/>
+            <a:ext cx="9142560" cy="1004400"/>
           </a:xfrm>
           <a:prstGeom prst="rect">
             <a:avLst/>
@@ -16835,7 +16775,7 @@
         <p:spPr>
           <a:xfrm>
             <a:off x="0" y="0"/>
-            <a:ext cx="108720" cy="1004760"/>
+            <a:ext cx="108360" cy="1004400"/>
           </a:xfrm>
           <a:prstGeom prst="rect">
             <a:avLst/>
@@ -16866,7 +16806,7 @@
         <p:spPr>
           <a:xfrm>
             <a:off x="255960" y="128160"/>
-            <a:ext cx="8502840" cy="547560"/>
+            <a:ext cx="8502480" cy="547200"/>
           </a:xfrm>
           <a:prstGeom prst="rect">
             <a:avLst/>
@@ -16921,7 +16861,7 @@
         <p:spPr>
           <a:xfrm>
             <a:off x="255960" y="658440"/>
-            <a:ext cx="8502840" cy="273240"/>
+            <a:ext cx="8502480" cy="272880"/>
           </a:xfrm>
           <a:prstGeom prst="rect">
             <a:avLst/>
@@ -16976,7 +16916,7 @@
         <p:spPr>
           <a:xfrm>
             <a:off x="320040" y="1143000"/>
-            <a:ext cx="8502840" cy="803520"/>
+            <a:ext cx="8502480" cy="803160"/>
           </a:xfrm>
           <a:prstGeom prst="rect">
             <a:avLst/>
@@ -17014,7 +16954,7 @@
         <p:spPr>
           <a:xfrm>
             <a:off x="320040" y="1143000"/>
-            <a:ext cx="8502840" cy="72000"/>
+            <a:ext cx="8502480" cy="71640"/>
           </a:xfrm>
           <a:prstGeom prst="rect">
             <a:avLst/>
@@ -17045,7 +16985,7 @@
         <p:spPr>
           <a:xfrm>
             <a:off x="457200" y="1261800"/>
-            <a:ext cx="8228520" cy="565920"/>
+            <a:ext cx="8228160" cy="565560"/>
           </a:xfrm>
           <a:prstGeom prst="rect">
             <a:avLst/>
@@ -17100,7 +17040,7 @@
         <p:spPr>
           <a:xfrm>
             <a:off x="320040" y="2057400"/>
-            <a:ext cx="2742120" cy="1260720"/>
+            <a:ext cx="2741760" cy="1260360"/>
           </a:xfrm>
           <a:prstGeom prst="rect">
             <a:avLst/>
@@ -17138,7 +17078,7 @@
         <p:spPr>
           <a:xfrm>
             <a:off x="320040" y="2057400"/>
-            <a:ext cx="2742120" cy="63000"/>
+            <a:ext cx="2741760" cy="62640"/>
           </a:xfrm>
           <a:prstGeom prst="rect">
             <a:avLst/>
@@ -17169,7 +17109,7 @@
         <p:spPr>
           <a:xfrm>
             <a:off x="2423160" y="2148840"/>
-            <a:ext cx="565920" cy="254880"/>
+            <a:ext cx="565560" cy="254520"/>
           </a:xfrm>
           <a:prstGeom prst="rect">
             <a:avLst/>
@@ -17207,7 +17147,7 @@
         <p:spPr>
           <a:xfrm>
             <a:off x="2423160" y="2148840"/>
-            <a:ext cx="565920" cy="254880"/>
+            <a:ext cx="565560" cy="254520"/>
           </a:xfrm>
           <a:prstGeom prst="rect">
             <a:avLst/>
@@ -17272,7 +17212,7 @@
         <p:spPr>
           <a:xfrm>
             <a:off x="457200" y="2185560"/>
-            <a:ext cx="1919160" cy="318960"/>
+            <a:ext cx="1918800" cy="318600"/>
           </a:xfrm>
           <a:prstGeom prst="rect">
             <a:avLst/>
@@ -17327,7 +17267,7 @@
         <p:spPr>
           <a:xfrm>
             <a:off x="457200" y="2532960"/>
-            <a:ext cx="2486160" cy="318960"/>
+            <a:ext cx="2485800" cy="318600"/>
           </a:xfrm>
           <a:prstGeom prst="rect">
             <a:avLst/>
@@ -17382,7 +17322,7 @@
         <p:spPr>
           <a:xfrm>
             <a:off x="457200" y="2880360"/>
-            <a:ext cx="2486160" cy="318960"/>
+            <a:ext cx="2485800" cy="318600"/>
           </a:xfrm>
           <a:prstGeom prst="rect">
             <a:avLst/>
@@ -17437,7 +17377,7 @@
         <p:spPr>
           <a:xfrm>
             <a:off x="3264480" y="2057400"/>
-            <a:ext cx="2855160" cy="1542240"/>
+            <a:ext cx="2854800" cy="1541880"/>
           </a:xfrm>
           <a:prstGeom prst="rect">
             <a:avLst/>
@@ -17475,7 +17415,7 @@
         <p:spPr>
           <a:xfrm>
             <a:off x="3264480" y="2057400"/>
-            <a:ext cx="2742120" cy="63000"/>
+            <a:ext cx="2741760" cy="62640"/>
           </a:xfrm>
           <a:prstGeom prst="rect">
             <a:avLst/>
@@ -17506,7 +17446,7 @@
         <p:spPr>
           <a:xfrm>
             <a:off x="3401640" y="2185560"/>
-            <a:ext cx="1919160" cy="318960"/>
+            <a:ext cx="1918800" cy="318600"/>
           </a:xfrm>
           <a:prstGeom prst="rect">
             <a:avLst/>
@@ -17561,7 +17501,7 @@
         <p:spPr>
           <a:xfrm>
             <a:off x="3401640" y="2532960"/>
-            <a:ext cx="2486160" cy="318960"/>
+            <a:ext cx="2485800" cy="318600"/>
           </a:xfrm>
           <a:prstGeom prst="rect">
             <a:avLst/>
@@ -17616,7 +17556,7 @@
         <p:spPr>
           <a:xfrm>
             <a:off x="3401640" y="2880360"/>
-            <a:ext cx="2486160" cy="318960"/>
+            <a:ext cx="2485800" cy="318600"/>
           </a:xfrm>
           <a:prstGeom prst="rect">
             <a:avLst/>
@@ -17671,7 +17611,7 @@
         <p:spPr>
           <a:xfrm>
             <a:off x="6346080" y="3575160"/>
-            <a:ext cx="1919160" cy="318960"/>
+            <a:ext cx="1918800" cy="318600"/>
           </a:xfrm>
           <a:prstGeom prst="rect">
             <a:avLst/>
@@ -17726,7 +17666,7 @@
         <p:spPr>
           <a:xfrm>
             <a:off x="6346080" y="3922920"/>
-            <a:ext cx="2486160" cy="318960"/>
+            <a:ext cx="2485800" cy="318600"/>
           </a:xfrm>
           <a:prstGeom prst="rect">
             <a:avLst/>
@@ -17781,7 +17721,7 @@
         <p:spPr>
           <a:xfrm>
             <a:off x="6346080" y="4270320"/>
-            <a:ext cx="2486160" cy="318960"/>
+            <a:ext cx="2485800" cy="318600"/>
           </a:xfrm>
           <a:prstGeom prst="rect">
             <a:avLst/>
@@ -17836,7 +17776,7 @@
         <p:spPr>
           <a:xfrm>
             <a:off x="320040" y="3447360"/>
-            <a:ext cx="2742120" cy="63000"/>
+            <a:ext cx="2741760" cy="62640"/>
           </a:xfrm>
           <a:prstGeom prst="rect">
             <a:avLst/>
@@ -17867,7 +17807,7 @@
         <p:spPr>
           <a:xfrm>
             <a:off x="457200" y="3922920"/>
-            <a:ext cx="2486160" cy="318960"/>
+            <a:ext cx="2485800" cy="318600"/>
           </a:xfrm>
           <a:prstGeom prst="rect">
             <a:avLst/>
@@ -17922,7 +17862,7 @@
         <p:spPr>
           <a:xfrm>
             <a:off x="457200" y="4270320"/>
-            <a:ext cx="2486160" cy="318960"/>
+            <a:ext cx="2485800" cy="318600"/>
           </a:xfrm>
           <a:prstGeom prst="rect">
             <a:avLst/>
@@ -17977,7 +17917,7 @@
         <p:spPr>
           <a:xfrm>
             <a:off x="3264480" y="4837320"/>
-            <a:ext cx="2742120" cy="63000"/>
+            <a:ext cx="2741760" cy="62640"/>
           </a:xfrm>
           <a:prstGeom prst="rect">
             <a:avLst/>
@@ -18008,7 +17948,7 @@
         <p:spPr>
           <a:xfrm>
             <a:off x="3401640" y="4965120"/>
-            <a:ext cx="1919160" cy="318960"/>
+            <a:ext cx="1918800" cy="318600"/>
           </a:xfrm>
           <a:prstGeom prst="rect">
             <a:avLst/>
@@ -18063,7 +18003,7 @@
         <p:spPr>
           <a:xfrm>
             <a:off x="3401640" y="5312520"/>
-            <a:ext cx="2486160" cy="318960"/>
+            <a:ext cx="2485800" cy="318600"/>
           </a:xfrm>
           <a:prstGeom prst="rect">
             <a:avLst/>
@@ -18118,7 +18058,7 @@
         <p:spPr>
           <a:xfrm>
             <a:off x="3401640" y="5660280"/>
-            <a:ext cx="2486160" cy="318960"/>
+            <a:ext cx="2485800" cy="318600"/>
           </a:xfrm>
           <a:prstGeom prst="rect">
             <a:avLst/>
@@ -18173,7 +18113,7 @@
         <p:spPr>
           <a:xfrm>
             <a:off x="6346080" y="4965120"/>
-            <a:ext cx="1919160" cy="318960"/>
+            <a:ext cx="1918800" cy="318600"/>
           </a:xfrm>
           <a:prstGeom prst="rect">
             <a:avLst/>
@@ -18228,7 +18168,7 @@
         <p:spPr>
           <a:xfrm>
             <a:off x="6346080" y="5312520"/>
-            <a:ext cx="2486160" cy="318960"/>
+            <a:ext cx="2485800" cy="318600"/>
           </a:xfrm>
           <a:prstGeom prst="rect">
             <a:avLst/>
@@ -18283,7 +18223,7 @@
         <p:spPr>
           <a:xfrm>
             <a:off x="6346080" y="5660280"/>
-            <a:ext cx="2486160" cy="318960"/>
+            <a:ext cx="2485800" cy="318600"/>
           </a:xfrm>
           <a:prstGeom prst="rect">
             <a:avLst/>
@@ -18338,7 +18278,7 @@
         <p:spPr>
           <a:xfrm>
             <a:off x="320040" y="4773240"/>
-            <a:ext cx="8502840" cy="273240"/>
+            <a:ext cx="8502480" cy="272880"/>
           </a:xfrm>
           <a:prstGeom prst="rect">
             <a:avLst/>
@@ -18376,7 +18316,7 @@
         <p:spPr>
           <a:xfrm>
             <a:off x="320040" y="4773240"/>
-            <a:ext cx="90360" cy="273240"/>
+            <a:ext cx="90000" cy="272880"/>
           </a:xfrm>
           <a:prstGeom prst="rect">
             <a:avLst/>
@@ -18407,7 +18347,7 @@
         <p:spPr>
           <a:xfrm>
             <a:off x="502920" y="4773240"/>
-            <a:ext cx="8228520" cy="273240"/>
+            <a:ext cx="8228160" cy="272880"/>
           </a:xfrm>
           <a:prstGeom prst="rect">
             <a:avLst/>
@@ -18509,7 +18449,7 @@
         <p:spPr>
           <a:xfrm>
             <a:off x="0" y="0"/>
-            <a:ext cx="9142920" cy="1004760"/>
+            <a:ext cx="9142560" cy="1004400"/>
           </a:xfrm>
           <a:prstGeom prst="rect">
             <a:avLst/>
@@ -18540,7 +18480,7 @@
         <p:spPr>
           <a:xfrm>
             <a:off x="0" y="0"/>
-            <a:ext cx="108720" cy="1004760"/>
+            <a:ext cx="108360" cy="1004400"/>
           </a:xfrm>
           <a:prstGeom prst="rect">
             <a:avLst/>
@@ -18571,7 +18511,7 @@
         <p:spPr>
           <a:xfrm>
             <a:off x="255960" y="128160"/>
-            <a:ext cx="8502840" cy="547560"/>
+            <a:ext cx="8502480" cy="547200"/>
           </a:xfrm>
           <a:prstGeom prst="rect">
             <a:avLst/>
@@ -18626,7 +18566,7 @@
         <p:spPr>
           <a:xfrm>
             <a:off x="255960" y="658440"/>
-            <a:ext cx="8502840" cy="273240"/>
+            <a:ext cx="8502480" cy="272880"/>
           </a:xfrm>
           <a:prstGeom prst="rect">
             <a:avLst/>
@@ -18681,7 +18621,7 @@
         <p:spPr>
           <a:xfrm>
             <a:off x="320040" y="1170360"/>
-            <a:ext cx="4205160" cy="894960"/>
+            <a:ext cx="4204800" cy="894600"/>
           </a:xfrm>
           <a:prstGeom prst="rect">
             <a:avLst/>
@@ -18719,7 +18659,7 @@
         <p:spPr>
           <a:xfrm>
             <a:off x="320040" y="1170360"/>
-            <a:ext cx="72000" cy="894960"/>
+            <a:ext cx="71640" cy="894600"/>
           </a:xfrm>
           <a:prstGeom prst="rect">
             <a:avLst/>
@@ -18750,7 +18690,7 @@
         <p:spPr>
           <a:xfrm>
             <a:off x="484560" y="1225440"/>
-            <a:ext cx="364680" cy="364680"/>
+            <a:ext cx="364320" cy="364320"/>
           </a:xfrm>
           <a:prstGeom prst="ellipse">
             <a:avLst/>
@@ -18781,7 +18721,7 @@
         <p:spPr>
           <a:xfrm>
             <a:off x="484560" y="1225440"/>
-            <a:ext cx="364680" cy="364680"/>
+            <a:ext cx="364320" cy="364320"/>
           </a:xfrm>
           <a:prstGeom prst="rect">
             <a:avLst/>
@@ -18836,7 +18776,7 @@
         <p:spPr>
           <a:xfrm>
             <a:off x="941760" y="1225440"/>
-            <a:ext cx="1507680" cy="318960"/>
+            <a:ext cx="1507320" cy="318600"/>
           </a:xfrm>
           <a:prstGeom prst="rect">
             <a:avLst/>
@@ -18891,7 +18831,7 @@
         <p:spPr>
           <a:xfrm>
             <a:off x="941760" y="1591200"/>
-            <a:ext cx="3473640" cy="419400"/>
+            <a:ext cx="3473280" cy="419040"/>
           </a:xfrm>
           <a:prstGeom prst="rect">
             <a:avLst/>
@@ -18946,7 +18886,7 @@
         <p:spPr>
           <a:xfrm>
             <a:off x="4800600" y="1170360"/>
-            <a:ext cx="4205160" cy="894960"/>
+            <a:ext cx="4204800" cy="894600"/>
           </a:xfrm>
           <a:prstGeom prst="rect">
             <a:avLst/>
@@ -18984,7 +18924,7 @@
         <p:spPr>
           <a:xfrm>
             <a:off x="4800600" y="1170360"/>
-            <a:ext cx="72000" cy="894960"/>
+            <a:ext cx="71640" cy="894600"/>
           </a:xfrm>
           <a:prstGeom prst="rect">
             <a:avLst/>
@@ -19015,7 +18955,7 @@
         <p:spPr>
           <a:xfrm>
             <a:off x="4965120" y="1225440"/>
-            <a:ext cx="364680" cy="364680"/>
+            <a:ext cx="364320" cy="364320"/>
           </a:xfrm>
           <a:prstGeom prst="ellipse">
             <a:avLst/>
@@ -19046,7 +18986,7 @@
         <p:spPr>
           <a:xfrm>
             <a:off x="4965120" y="1225440"/>
-            <a:ext cx="364680" cy="364680"/>
+            <a:ext cx="364320" cy="364320"/>
           </a:xfrm>
           <a:prstGeom prst="rect">
             <a:avLst/>
@@ -19101,7 +19041,7 @@
         <p:spPr>
           <a:xfrm>
             <a:off x="5422320" y="1225440"/>
-            <a:ext cx="1507680" cy="318960"/>
+            <a:ext cx="1507320" cy="318600"/>
           </a:xfrm>
           <a:prstGeom prst="rect">
             <a:avLst/>
@@ -19156,7 +19096,7 @@
         <p:spPr>
           <a:xfrm>
             <a:off x="5422320" y="1591200"/>
-            <a:ext cx="3473640" cy="419400"/>
+            <a:ext cx="3473280" cy="419040"/>
           </a:xfrm>
           <a:prstGeom prst="rect">
             <a:avLst/>
@@ -19211,7 +19151,7 @@
         <p:spPr>
           <a:xfrm>
             <a:off x="320040" y="2139840"/>
-            <a:ext cx="4205160" cy="894960"/>
+            <a:ext cx="4204800" cy="894600"/>
           </a:xfrm>
           <a:prstGeom prst="rect">
             <a:avLst/>
@@ -19249,7 +19189,7 @@
         <p:spPr>
           <a:xfrm>
             <a:off x="320040" y="2139840"/>
-            <a:ext cx="72000" cy="894960"/>
+            <a:ext cx="71640" cy="894600"/>
           </a:xfrm>
           <a:prstGeom prst="rect">
             <a:avLst/>
@@ -19280,7 +19220,7 @@
         <p:spPr>
           <a:xfrm>
             <a:off x="484560" y="2194560"/>
-            <a:ext cx="364680" cy="364680"/>
+            <a:ext cx="364320" cy="364320"/>
           </a:xfrm>
           <a:prstGeom prst="ellipse">
             <a:avLst/>
@@ -19311,7 +19251,7 @@
         <p:spPr>
           <a:xfrm>
             <a:off x="484560" y="2194560"/>
-            <a:ext cx="364680" cy="364680"/>
+            <a:ext cx="364320" cy="364320"/>
           </a:xfrm>
           <a:prstGeom prst="rect">
             <a:avLst/>
@@ -19366,7 +19306,7 @@
         <p:spPr>
           <a:xfrm>
             <a:off x="941760" y="2194560"/>
-            <a:ext cx="1507680" cy="318960"/>
+            <a:ext cx="1507320" cy="318600"/>
           </a:xfrm>
           <a:prstGeom prst="rect">
             <a:avLst/>
@@ -19421,7 +19361,7 @@
         <p:spPr>
           <a:xfrm>
             <a:off x="941760" y="2560320"/>
-            <a:ext cx="3473640" cy="419400"/>
+            <a:ext cx="3473280" cy="419040"/>
           </a:xfrm>
           <a:prstGeom prst="rect">
             <a:avLst/>
@@ -19476,7 +19416,7 @@
         <p:spPr>
           <a:xfrm>
             <a:off x="4800600" y="2139840"/>
-            <a:ext cx="4205160" cy="894960"/>
+            <a:ext cx="4204800" cy="894600"/>
           </a:xfrm>
           <a:prstGeom prst="rect">
             <a:avLst/>
@@ -19514,7 +19454,7 @@
         <p:spPr>
           <a:xfrm>
             <a:off x="4800600" y="2139840"/>
-            <a:ext cx="72000" cy="894960"/>
+            <a:ext cx="71640" cy="894600"/>
           </a:xfrm>
           <a:prstGeom prst="rect">
             <a:avLst/>
@@ -19545,7 +19485,7 @@
         <p:spPr>
           <a:xfrm>
             <a:off x="4965120" y="2194560"/>
-            <a:ext cx="364680" cy="364680"/>
+            <a:ext cx="364320" cy="364320"/>
           </a:xfrm>
           <a:prstGeom prst="ellipse">
             <a:avLst/>
@@ -19576,7 +19516,7 @@
         <p:spPr>
           <a:xfrm>
             <a:off x="4965120" y="2194560"/>
-            <a:ext cx="364680" cy="364680"/>
+            <a:ext cx="364320" cy="364320"/>
           </a:xfrm>
           <a:prstGeom prst="rect">
             <a:avLst/>
@@ -19631,7 +19571,7 @@
         <p:spPr>
           <a:xfrm>
             <a:off x="5422320" y="2194560"/>
-            <a:ext cx="1507680" cy="318960"/>
+            <a:ext cx="1507320" cy="318600"/>
           </a:xfrm>
           <a:prstGeom prst="rect">
             <a:avLst/>
@@ -19686,7 +19626,7 @@
         <p:spPr>
           <a:xfrm>
             <a:off x="5422320" y="2560320"/>
-            <a:ext cx="3473640" cy="419400"/>
+            <a:ext cx="3473280" cy="419040"/>
           </a:xfrm>
           <a:prstGeom prst="rect">
             <a:avLst/>
@@ -19741,7 +19681,7 @@
         <p:spPr>
           <a:xfrm>
             <a:off x="320040" y="3108960"/>
-            <a:ext cx="4205160" cy="894960"/>
+            <a:ext cx="4204800" cy="894600"/>
           </a:xfrm>
           <a:prstGeom prst="rect">
             <a:avLst/>
@@ -19779,7 +19719,7 @@
         <p:spPr>
           <a:xfrm>
             <a:off x="320040" y="3108960"/>
-            <a:ext cx="72000" cy="894960"/>
+            <a:ext cx="71640" cy="894600"/>
           </a:xfrm>
           <a:prstGeom prst="rect">
             <a:avLst/>
@@ -19810,7 +19750,7 @@
         <p:spPr>
           <a:xfrm>
             <a:off x="484560" y="3163680"/>
-            <a:ext cx="364680" cy="364680"/>
+            <a:ext cx="364320" cy="364320"/>
           </a:xfrm>
           <a:prstGeom prst="ellipse">
             <a:avLst/>
@@ -19841,7 +19781,7 @@
         <p:spPr>
           <a:xfrm>
             <a:off x="484560" y="3163680"/>
-            <a:ext cx="364680" cy="364680"/>
+            <a:ext cx="364320" cy="364320"/>
           </a:xfrm>
           <a:prstGeom prst="rect">
             <a:avLst/>
@@ -19896,7 +19836,7 @@
         <p:spPr>
           <a:xfrm>
             <a:off x="941760" y="3163680"/>
-            <a:ext cx="1507680" cy="318960"/>
+            <a:ext cx="1507320" cy="318600"/>
           </a:xfrm>
           <a:prstGeom prst="rect">
             <a:avLst/>
@@ -19951,7 +19891,7 @@
         <p:spPr>
           <a:xfrm>
             <a:off x="941760" y="3529440"/>
-            <a:ext cx="3473640" cy="419400"/>
+            <a:ext cx="3473280" cy="419040"/>
           </a:xfrm>
           <a:prstGeom prst="rect">
             <a:avLst/>
@@ -20006,7 +19946,7 @@
         <p:spPr>
           <a:xfrm>
             <a:off x="4800600" y="3108960"/>
-            <a:ext cx="4205160" cy="894960"/>
+            <a:ext cx="4204800" cy="894600"/>
           </a:xfrm>
           <a:prstGeom prst="rect">
             <a:avLst/>
@@ -20044,7 +19984,7 @@
         <p:spPr>
           <a:xfrm>
             <a:off x="4800600" y="3108960"/>
-            <a:ext cx="72000" cy="894960"/>
+            <a:ext cx="71640" cy="894600"/>
           </a:xfrm>
           <a:prstGeom prst="rect">
             <a:avLst/>
@@ -20075,7 +20015,7 @@
         <p:spPr>
           <a:xfrm>
             <a:off x="4965120" y="3163680"/>
-            <a:ext cx="364680" cy="364680"/>
+            <a:ext cx="364320" cy="364320"/>
           </a:xfrm>
           <a:prstGeom prst="ellipse">
             <a:avLst/>
@@ -20106,7 +20046,7 @@
         <p:spPr>
           <a:xfrm>
             <a:off x="4965120" y="3163680"/>
-            <a:ext cx="364680" cy="364680"/>
+            <a:ext cx="364320" cy="364320"/>
           </a:xfrm>
           <a:prstGeom prst="rect">
             <a:avLst/>
@@ -20161,7 +20101,7 @@
         <p:spPr>
           <a:xfrm>
             <a:off x="5422320" y="3163680"/>
-            <a:ext cx="1507680" cy="318960"/>
+            <a:ext cx="1507320" cy="318600"/>
           </a:xfrm>
           <a:prstGeom prst="rect">
             <a:avLst/>
@@ -20216,7 +20156,7 @@
         <p:spPr>
           <a:xfrm>
             <a:off x="5422320" y="3529440"/>
-            <a:ext cx="3473640" cy="419400"/>
+            <a:ext cx="3473280" cy="419040"/>
           </a:xfrm>
           <a:prstGeom prst="rect">
             <a:avLst/>
@@ -20271,7 +20211,7 @@
         <p:spPr>
           <a:xfrm>
             <a:off x="320040" y="4078080"/>
-            <a:ext cx="4205160" cy="894960"/>
+            <a:ext cx="4204800" cy="894600"/>
           </a:xfrm>
           <a:prstGeom prst="rect">
             <a:avLst/>
@@ -20309,7 +20249,7 @@
         <p:spPr>
           <a:xfrm>
             <a:off x="320040" y="4078080"/>
-            <a:ext cx="72000" cy="894960"/>
+            <a:ext cx="71640" cy="894600"/>
           </a:xfrm>
           <a:prstGeom prst="rect">
             <a:avLst/>
@@ -20340,7 +20280,7 @@
         <p:spPr>
           <a:xfrm>
             <a:off x="484560" y="4133160"/>
-            <a:ext cx="364680" cy="364680"/>
+            <a:ext cx="364320" cy="364320"/>
           </a:xfrm>
           <a:prstGeom prst="ellipse">
             <a:avLst/>
@@ -20371,7 +20311,7 @@
         <p:spPr>
           <a:xfrm>
             <a:off x="484560" y="4133160"/>
-            <a:ext cx="364680" cy="364680"/>
+            <a:ext cx="364320" cy="364320"/>
           </a:xfrm>
           <a:prstGeom prst="rect">
             <a:avLst/>
@@ -20426,7 +20366,7 @@
         <p:spPr>
           <a:xfrm>
             <a:off x="941760" y="4133160"/>
-            <a:ext cx="1507680" cy="318960"/>
+            <a:ext cx="1507320" cy="318600"/>
           </a:xfrm>
           <a:prstGeom prst="rect">
             <a:avLst/>
@@ -20481,7 +20421,7 @@
         <p:spPr>
           <a:xfrm>
             <a:off x="941760" y="4498920"/>
-            <a:ext cx="3473640" cy="419400"/>
+            <a:ext cx="3473280" cy="419040"/>
           </a:xfrm>
           <a:prstGeom prst="rect">
             <a:avLst/>
@@ -20536,7 +20476,7 @@
         <p:spPr>
           <a:xfrm>
             <a:off x="4800600" y="4078080"/>
-            <a:ext cx="4205160" cy="894960"/>
+            <a:ext cx="4204800" cy="894600"/>
           </a:xfrm>
           <a:prstGeom prst="rect">
             <a:avLst/>
@@ -20574,7 +20514,7 @@
         <p:spPr>
           <a:xfrm>
             <a:off x="4800600" y="4078080"/>
-            <a:ext cx="72000" cy="894960"/>
+            <a:ext cx="71640" cy="894600"/>
           </a:xfrm>
           <a:prstGeom prst="rect">
             <a:avLst/>
@@ -20605,7 +20545,7 @@
         <p:spPr>
           <a:xfrm>
             <a:off x="4965120" y="4133160"/>
-            <a:ext cx="364680" cy="364680"/>
+            <a:ext cx="364320" cy="364320"/>
           </a:xfrm>
           <a:prstGeom prst="ellipse">
             <a:avLst/>
@@ -20636,7 +20576,7 @@
         <p:spPr>
           <a:xfrm>
             <a:off x="4965120" y="4133160"/>
-            <a:ext cx="364680" cy="364680"/>
+            <a:ext cx="364320" cy="364320"/>
           </a:xfrm>
           <a:prstGeom prst="rect">
             <a:avLst/>
@@ -20691,7 +20631,7 @@
         <p:spPr>
           <a:xfrm>
             <a:off x="5422320" y="4133160"/>
-            <a:ext cx="1507680" cy="318960"/>
+            <a:ext cx="1507320" cy="318600"/>
           </a:xfrm>
           <a:prstGeom prst="rect">
             <a:avLst/>
@@ -20746,7 +20686,7 @@
         <p:spPr>
           <a:xfrm>
             <a:off x="5422320" y="4498920"/>
-            <a:ext cx="3473640" cy="419400"/>
+            <a:ext cx="3473280" cy="419040"/>
           </a:xfrm>
           <a:prstGeom prst="rect">
             <a:avLst/>
@@ -20801,7 +20741,7 @@
         <p:spPr>
           <a:xfrm>
             <a:off x="320040" y="4937760"/>
-            <a:ext cx="8502840" cy="108720"/>
+            <a:ext cx="8502480" cy="108360"/>
           </a:xfrm>
           <a:prstGeom prst="rect">
             <a:avLst/>
@@ -20876,7 +20816,7 @@
         <p:spPr>
           <a:xfrm>
             <a:off x="0" y="0"/>
-            <a:ext cx="9142920" cy="1004760"/>
+            <a:ext cx="9142560" cy="1004400"/>
           </a:xfrm>
           <a:prstGeom prst="rect">
             <a:avLst/>
@@ -20907,7 +20847,7 @@
         <p:spPr>
           <a:xfrm>
             <a:off x="0" y="0"/>
-            <a:ext cx="108720" cy="1004760"/>
+            <a:ext cx="108360" cy="1004400"/>
           </a:xfrm>
           <a:prstGeom prst="rect">
             <a:avLst/>
@@ -20938,7 +20878,7 @@
         <p:spPr>
           <a:xfrm>
             <a:off x="255960" y="128160"/>
-            <a:ext cx="8502840" cy="547560"/>
+            <a:ext cx="8502480" cy="547200"/>
           </a:xfrm>
           <a:prstGeom prst="rect">
             <a:avLst/>
@@ -20993,7 +20933,7 @@
         <p:spPr>
           <a:xfrm>
             <a:off x="255960" y="658440"/>
-            <a:ext cx="8502840" cy="273240"/>
+            <a:ext cx="8502480" cy="272880"/>
           </a:xfrm>
           <a:prstGeom prst="rect">
             <a:avLst/>
@@ -21048,7 +20988,7 @@
         <p:spPr>
           <a:xfrm>
             <a:off x="365760" y="1170360"/>
-            <a:ext cx="8411400" cy="565920"/>
+            <a:ext cx="8411040" cy="565560"/>
           </a:xfrm>
           <a:prstGeom prst="rect">
             <a:avLst/>
@@ -21086,7 +21026,7 @@
         <p:spPr>
           <a:xfrm>
             <a:off x="365760" y="1170360"/>
-            <a:ext cx="474480" cy="565920"/>
+            <a:ext cx="474120" cy="565560"/>
           </a:xfrm>
           <a:prstGeom prst="rect">
             <a:avLst/>
@@ -21117,7 +21057,7 @@
         <p:spPr>
           <a:xfrm>
             <a:off x="365760" y="1170360"/>
-            <a:ext cx="474480" cy="565920"/>
+            <a:ext cx="474120" cy="565560"/>
           </a:xfrm>
           <a:prstGeom prst="rect">
             <a:avLst/>
@@ -21172,7 +21112,7 @@
         <p:spPr>
           <a:xfrm>
             <a:off x="951120" y="1225440"/>
-            <a:ext cx="2925000" cy="254880"/>
+            <a:ext cx="2924640" cy="254520"/>
           </a:xfrm>
           <a:prstGeom prst="rect">
             <a:avLst/>
@@ -21227,7 +21167,7 @@
         <p:spPr>
           <a:xfrm>
             <a:off x="951120" y="1499760"/>
-            <a:ext cx="7588440" cy="200160"/>
+            <a:ext cx="7588080" cy="199800"/>
           </a:xfrm>
           <a:prstGeom prst="rect">
             <a:avLst/>
@@ -21282,7 +21222,7 @@
         <p:spPr>
           <a:xfrm>
             <a:off x="365760" y="1828800"/>
-            <a:ext cx="8411400" cy="565920"/>
+            <a:ext cx="8411040" cy="565560"/>
           </a:xfrm>
           <a:prstGeom prst="rect">
             <a:avLst/>
@@ -21320,7 +21260,7 @@
         <p:spPr>
           <a:xfrm>
             <a:off x="365760" y="1828800"/>
-            <a:ext cx="474480" cy="565920"/>
+            <a:ext cx="474120" cy="565560"/>
           </a:xfrm>
           <a:prstGeom prst="rect">
             <a:avLst/>
@@ -21351,7 +21291,7 @@
         <p:spPr>
           <a:xfrm>
             <a:off x="365760" y="1828800"/>
-            <a:ext cx="474480" cy="565920"/>
+            <a:ext cx="474120" cy="565560"/>
           </a:xfrm>
           <a:prstGeom prst="rect">
             <a:avLst/>
@@ -21406,7 +21346,7 @@
         <p:spPr>
           <a:xfrm>
             <a:off x="951120" y="1883520"/>
-            <a:ext cx="2925000" cy="254880"/>
+            <a:ext cx="2924640" cy="254520"/>
           </a:xfrm>
           <a:prstGeom prst="rect">
             <a:avLst/>
@@ -21461,7 +21401,7 @@
         <p:spPr>
           <a:xfrm>
             <a:off x="951120" y="2157840"/>
-            <a:ext cx="7588440" cy="200160"/>
+            <a:ext cx="7588080" cy="199800"/>
           </a:xfrm>
           <a:prstGeom prst="rect">
             <a:avLst/>
@@ -21516,7 +21456,7 @@
         <p:spPr>
           <a:xfrm>
             <a:off x="365760" y="2487240"/>
-            <a:ext cx="8411400" cy="565920"/>
+            <a:ext cx="8411040" cy="565560"/>
           </a:xfrm>
           <a:prstGeom prst="rect">
             <a:avLst/>
@@ -21554,7 +21494,7 @@
         <p:spPr>
           <a:xfrm>
             <a:off x="365760" y="2487240"/>
-            <a:ext cx="474480" cy="565920"/>
+            <a:ext cx="474120" cy="565560"/>
           </a:xfrm>
           <a:prstGeom prst="rect">
             <a:avLst/>
@@ -21585,7 +21525,7 @@
         <p:spPr>
           <a:xfrm>
             <a:off x="365760" y="2487240"/>
-            <a:ext cx="474480" cy="565920"/>
+            <a:ext cx="474120" cy="565560"/>
           </a:xfrm>
           <a:prstGeom prst="rect">
             <a:avLst/>
@@ -21640,7 +21580,7 @@
         <p:spPr>
           <a:xfrm>
             <a:off x="951120" y="2541960"/>
-            <a:ext cx="2925000" cy="254880"/>
+            <a:ext cx="2924640" cy="254520"/>
           </a:xfrm>
           <a:prstGeom prst="rect">
             <a:avLst/>
@@ -21695,7 +21635,7 @@
         <p:spPr>
           <a:xfrm>
             <a:off x="951120" y="2816280"/>
-            <a:ext cx="7588440" cy="200160"/>
+            <a:ext cx="7588080" cy="199800"/>
           </a:xfrm>
           <a:prstGeom prst="rect">
             <a:avLst/>
@@ -21750,7 +21690,7 @@
         <p:spPr>
           <a:xfrm>
             <a:off x="365760" y="3145680"/>
-            <a:ext cx="8411400" cy="565920"/>
+            <a:ext cx="8411040" cy="565560"/>
           </a:xfrm>
           <a:prstGeom prst="rect">
             <a:avLst/>
@@ -21788,7 +21728,7 @@
         <p:spPr>
           <a:xfrm>
             <a:off x="365760" y="3145680"/>
-            <a:ext cx="474480" cy="565920"/>
+            <a:ext cx="474120" cy="565560"/>
           </a:xfrm>
           <a:prstGeom prst="rect">
             <a:avLst/>
@@ -21819,7 +21759,7 @@
         <p:spPr>
           <a:xfrm>
             <a:off x="365760" y="3145680"/>
-            <a:ext cx="474480" cy="565920"/>
+            <a:ext cx="474120" cy="565560"/>
           </a:xfrm>
           <a:prstGeom prst="rect">
             <a:avLst/>
@@ -21874,7 +21814,7 @@
         <p:spPr>
           <a:xfrm>
             <a:off x="951120" y="3200400"/>
-            <a:ext cx="2925000" cy="254880"/>
+            <a:ext cx="2924640" cy="254520"/>
           </a:xfrm>
           <a:prstGeom prst="rect">
             <a:avLst/>
@@ -21929,7 +21869,7 @@
         <p:spPr>
           <a:xfrm>
             <a:off x="951120" y="3474720"/>
-            <a:ext cx="7588440" cy="200160"/>
+            <a:ext cx="7588080" cy="199800"/>
           </a:xfrm>
           <a:prstGeom prst="rect">
             <a:avLst/>
@@ -21984,7 +21924,7 @@
         <p:spPr>
           <a:xfrm>
             <a:off x="365760" y="3803760"/>
-            <a:ext cx="8411400" cy="565920"/>
+            <a:ext cx="8411040" cy="565560"/>
           </a:xfrm>
           <a:prstGeom prst="rect">
             <a:avLst/>
@@ -22022,7 +21962,7 @@
         <p:spPr>
           <a:xfrm>
             <a:off x="365760" y="3803760"/>
-            <a:ext cx="474480" cy="565920"/>
+            <a:ext cx="474120" cy="565560"/>
           </a:xfrm>
           <a:prstGeom prst="rect">
             <a:avLst/>
@@ -22053,7 +21993,7 @@
         <p:spPr>
           <a:xfrm>
             <a:off x="365760" y="3803760"/>
-            <a:ext cx="474480" cy="565920"/>
+            <a:ext cx="474120" cy="565560"/>
           </a:xfrm>
           <a:prstGeom prst="rect">
             <a:avLst/>
@@ -22108,7 +22048,7 @@
         <p:spPr>
           <a:xfrm>
             <a:off x="951120" y="3858840"/>
-            <a:ext cx="2925000" cy="254880"/>
+            <a:ext cx="2924640" cy="254520"/>
           </a:xfrm>
           <a:prstGeom prst="rect">
             <a:avLst/>
@@ -22163,7 +22103,7 @@
         <p:spPr>
           <a:xfrm>
             <a:off x="951120" y="4133160"/>
-            <a:ext cx="7588440" cy="200160"/>
+            <a:ext cx="7588080" cy="199800"/>
           </a:xfrm>
           <a:prstGeom prst="rect">
             <a:avLst/>
@@ -22218,7 +22158,7 @@
         <p:spPr>
           <a:xfrm>
             <a:off x="365760" y="4462200"/>
-            <a:ext cx="8411400" cy="565920"/>
+            <a:ext cx="8411040" cy="565560"/>
           </a:xfrm>
           <a:prstGeom prst="rect">
             <a:avLst/>
@@ -22256,7 +22196,7 @@
         <p:spPr>
           <a:xfrm>
             <a:off x="365760" y="4462200"/>
-            <a:ext cx="474480" cy="565920"/>
+            <a:ext cx="474120" cy="565560"/>
           </a:xfrm>
           <a:prstGeom prst="rect">
             <a:avLst/>
@@ -22287,7 +22227,7 @@
         <p:spPr>
           <a:xfrm>
             <a:off x="365760" y="4462200"/>
-            <a:ext cx="474480" cy="565920"/>
+            <a:ext cx="474120" cy="565560"/>
           </a:xfrm>
           <a:prstGeom prst="rect">
             <a:avLst/>
@@ -22342,7 +22282,7 @@
         <p:spPr>
           <a:xfrm>
             <a:off x="951120" y="4517280"/>
-            <a:ext cx="2925000" cy="254880"/>
+            <a:ext cx="2924640" cy="254520"/>
           </a:xfrm>
           <a:prstGeom prst="rect">
             <a:avLst/>
@@ -22397,7 +22337,7 @@
         <p:spPr>
           <a:xfrm>
             <a:off x="951120" y="4791600"/>
-            <a:ext cx="7588440" cy="200160"/>
+            <a:ext cx="7588080" cy="199800"/>
           </a:xfrm>
           <a:prstGeom prst="rect">
             <a:avLst/>
@@ -22489,7 +22429,7 @@
         <p:spPr>
           <a:xfrm>
             <a:off x="0" y="0"/>
-            <a:ext cx="9142920" cy="1004760"/>
+            <a:ext cx="9142560" cy="1004400"/>
           </a:xfrm>
           <a:prstGeom prst="rect">
             <a:avLst/>
@@ -22520,7 +22460,7 @@
         <p:spPr>
           <a:xfrm>
             <a:off x="0" y="0"/>
-            <a:ext cx="108720" cy="1004760"/>
+            <a:ext cx="108360" cy="1004400"/>
           </a:xfrm>
           <a:prstGeom prst="rect">
             <a:avLst/>
@@ -22551,7 +22491,7 @@
         <p:spPr>
           <a:xfrm>
             <a:off x="255960" y="128160"/>
-            <a:ext cx="8502840" cy="547560"/>
+            <a:ext cx="8502480" cy="547200"/>
           </a:xfrm>
           <a:prstGeom prst="rect">
             <a:avLst/>
@@ -22606,7 +22546,7 @@
         <p:spPr>
           <a:xfrm>
             <a:off x="255960" y="658440"/>
-            <a:ext cx="8502840" cy="273240"/>
+            <a:ext cx="8502480" cy="272880"/>
           </a:xfrm>
           <a:prstGeom prst="rect">
             <a:avLst/>
@@ -22661,7 +22601,7 @@
         <p:spPr>
           <a:xfrm>
             <a:off x="320040" y="1143000"/>
-            <a:ext cx="8502840" cy="913320"/>
+            <a:ext cx="8502480" cy="912960"/>
           </a:xfrm>
           <a:prstGeom prst="rect">
             <a:avLst/>
@@ -22699,7 +22639,7 @@
         <p:spPr>
           <a:xfrm>
             <a:off x="320040" y="1143000"/>
-            <a:ext cx="8502840" cy="72000"/>
+            <a:ext cx="8502480" cy="71640"/>
           </a:xfrm>
           <a:prstGeom prst="rect">
             <a:avLst/>
@@ -22730,7 +22670,7 @@
         <p:spPr>
           <a:xfrm>
             <a:off x="457200" y="1261800"/>
-            <a:ext cx="1690560" cy="474480"/>
+            <a:ext cx="1690200" cy="474120"/>
           </a:xfrm>
           <a:prstGeom prst="rect">
             <a:avLst/>
@@ -22795,7 +22735,7 @@
         <p:spPr>
           <a:xfrm>
             <a:off x="2148840" y="1261800"/>
-            <a:ext cx="6491160" cy="474480"/>
+            <a:ext cx="6490800" cy="474120"/>
           </a:xfrm>
           <a:prstGeom prst="rect">
             <a:avLst/>
@@ -22850,7 +22790,7 @@
         <p:spPr>
           <a:xfrm>
             <a:off x="457200" y="1901880"/>
-            <a:ext cx="8228520" cy="254880"/>
+            <a:ext cx="8228160" cy="254520"/>
           </a:xfrm>
           <a:prstGeom prst="rect">
             <a:avLst/>
@@ -22905,7 +22845,7 @@
         <p:spPr>
           <a:xfrm>
             <a:off x="320040" y="2267640"/>
-            <a:ext cx="4095360" cy="2742120"/>
+            <a:ext cx="4095000" cy="2741760"/>
           </a:xfrm>
           <a:prstGeom prst="rect">
             <a:avLst/>
@@ -22943,7 +22883,7 @@
         <p:spPr>
           <a:xfrm>
             <a:off x="457200" y="2377440"/>
-            <a:ext cx="3747960" cy="273240"/>
+            <a:ext cx="3747600" cy="272880"/>
           </a:xfrm>
           <a:prstGeom prst="rect">
             <a:avLst/>
@@ -22998,7 +22938,7 @@
         <p:spPr>
           <a:xfrm>
             <a:off x="365760" y="2706480"/>
-            <a:ext cx="4003920" cy="2175120"/>
+            <a:ext cx="4003560" cy="2174760"/>
           </a:xfrm>
           <a:prstGeom prst="rect">
             <a:avLst/>
@@ -23029,7 +22969,7 @@
         <p:spPr>
           <a:xfrm>
             <a:off x="365760" y="2706480"/>
-            <a:ext cx="565920" cy="200160"/>
+            <a:ext cx="565560" cy="199800"/>
           </a:xfrm>
           <a:prstGeom prst="rect">
             <a:avLst/>
@@ -23060,7 +23000,7 @@
         <p:spPr>
           <a:xfrm>
             <a:off x="365760" y="2706480"/>
-            <a:ext cx="565920" cy="200160"/>
+            <a:ext cx="565560" cy="199800"/>
           </a:xfrm>
           <a:prstGeom prst="rect">
             <a:avLst/>
@@ -23115,7 +23055,7 @@
         <p:spPr>
           <a:xfrm>
             <a:off x="457200" y="2962800"/>
-            <a:ext cx="3821040" cy="1873440"/>
+            <a:ext cx="3820680" cy="1873080"/>
           </a:xfrm>
           <a:prstGeom prst="rect">
             <a:avLst/>
@@ -23304,7 +23244,7 @@
         <p:spPr>
           <a:xfrm>
             <a:off x="4727520" y="2267640"/>
-            <a:ext cx="4095360" cy="2742120"/>
+            <a:ext cx="4095000" cy="2741760"/>
           </a:xfrm>
           <a:prstGeom prst="rect">
             <a:avLst/>
@@ -23342,7 +23282,7 @@
         <p:spPr>
           <a:xfrm>
             <a:off x="4864680" y="2377440"/>
-            <a:ext cx="3747960" cy="273240"/>
+            <a:ext cx="3747600" cy="272880"/>
           </a:xfrm>
           <a:prstGeom prst="rect">
             <a:avLst/>
@@ -23397,7 +23337,7 @@
         <p:spPr>
           <a:xfrm>
             <a:off x="4864680" y="2706480"/>
-            <a:ext cx="3747960" cy="2175120"/>
+            <a:ext cx="3747600" cy="2174760"/>
           </a:xfrm>
           <a:prstGeom prst="rect">
             <a:avLst/>
@@ -23578,7 +23518,7 @@
         <p:spPr>
           <a:xfrm>
             <a:off x="320040" y="4773240"/>
-            <a:ext cx="8502840" cy="273240"/>
+            <a:ext cx="8502480" cy="272880"/>
           </a:xfrm>
           <a:prstGeom prst="rect">
             <a:avLst/>
@@ -23616,7 +23556,7 @@
         <p:spPr>
           <a:xfrm>
             <a:off x="320040" y="4773240"/>
-            <a:ext cx="90360" cy="273240"/>
+            <a:ext cx="90000" cy="272880"/>
           </a:xfrm>
           <a:prstGeom prst="rect">
             <a:avLst/>
@@ -23647,7 +23587,7 @@
         <p:spPr>
           <a:xfrm>
             <a:off x="502920" y="4773240"/>
-            <a:ext cx="8228520" cy="273240"/>
+            <a:ext cx="8228160" cy="272880"/>
           </a:xfrm>
           <a:prstGeom prst="rect">
             <a:avLst/>
@@ -23749,7 +23689,7 @@
         <p:spPr>
           <a:xfrm>
             <a:off x="0" y="0"/>
-            <a:ext cx="9142920" cy="1004760"/>
+            <a:ext cx="9142560" cy="1004400"/>
           </a:xfrm>
           <a:prstGeom prst="rect">
             <a:avLst/>
@@ -23780,7 +23720,7 @@
         <p:spPr>
           <a:xfrm>
             <a:off x="0" y="0"/>
-            <a:ext cx="108720" cy="1004760"/>
+            <a:ext cx="108360" cy="1004400"/>
           </a:xfrm>
           <a:prstGeom prst="rect">
             <a:avLst/>
@@ -23811,7 +23751,7 @@
         <p:spPr>
           <a:xfrm>
             <a:off x="255960" y="128160"/>
-            <a:ext cx="8502840" cy="547560"/>
+            <a:ext cx="8502480" cy="547200"/>
           </a:xfrm>
           <a:prstGeom prst="rect">
             <a:avLst/>
@@ -23866,7 +23806,7 @@
         <p:spPr>
           <a:xfrm>
             <a:off x="255960" y="658440"/>
-            <a:ext cx="8502840" cy="273240"/>
+            <a:ext cx="8502480" cy="272880"/>
           </a:xfrm>
           <a:prstGeom prst="rect">
             <a:avLst/>
@@ -23921,7 +23861,7 @@
         <p:spPr>
           <a:xfrm>
             <a:off x="320040" y="1143000"/>
-            <a:ext cx="8502840" cy="383040"/>
+            <a:ext cx="8502480" cy="382680"/>
           </a:xfrm>
           <a:prstGeom prst="rect">
             <a:avLst/>
@@ -23952,7 +23892,7 @@
         <p:spPr>
           <a:xfrm>
             <a:off x="457200" y="1143000"/>
-            <a:ext cx="2010600" cy="383040"/>
+            <a:ext cx="2010240" cy="382680"/>
           </a:xfrm>
           <a:prstGeom prst="rect">
             <a:avLst/>
@@ -24007,7 +23947,7 @@
         <p:spPr>
           <a:xfrm>
             <a:off x="2468880" y="1143000"/>
-            <a:ext cx="2742120" cy="383040"/>
+            <a:ext cx="2741760" cy="382680"/>
           </a:xfrm>
           <a:prstGeom prst="rect">
             <a:avLst/>
@@ -24062,7 +24002,7 @@
         <p:spPr>
           <a:xfrm>
             <a:off x="5212080" y="1143000"/>
-            <a:ext cx="3473640" cy="383040"/>
+            <a:ext cx="3473280" cy="382680"/>
           </a:xfrm>
           <a:prstGeom prst="rect">
             <a:avLst/>
@@ -24117,7 +24057,7 @@
         <p:spPr>
           <a:xfrm>
             <a:off x="320040" y="1572840"/>
-            <a:ext cx="8502840" cy="510840"/>
+            <a:ext cx="8502480" cy="510480"/>
           </a:xfrm>
           <a:prstGeom prst="rect">
             <a:avLst/>
@@ -24155,7 +24095,7 @@
         <p:spPr>
           <a:xfrm>
             <a:off x="320040" y="1572840"/>
-            <a:ext cx="72000" cy="510840"/>
+            <a:ext cx="71640" cy="510480"/>
           </a:xfrm>
           <a:prstGeom prst="rect">
             <a:avLst/>
@@ -24186,7 +24126,7 @@
         <p:spPr>
           <a:xfrm>
             <a:off x="457200" y="1572840"/>
-            <a:ext cx="1964880" cy="510840"/>
+            <a:ext cx="1964520" cy="510480"/>
           </a:xfrm>
           <a:prstGeom prst="rect">
             <a:avLst/>
@@ -24241,7 +24181,7 @@
         <p:spPr>
           <a:xfrm>
             <a:off x="2468880" y="1572840"/>
-            <a:ext cx="2696400" cy="510840"/>
+            <a:ext cx="2696040" cy="510480"/>
           </a:xfrm>
           <a:prstGeom prst="rect">
             <a:avLst/>
@@ -24296,7 +24236,7 @@
         <p:spPr>
           <a:xfrm>
             <a:off x="5212080" y="1572840"/>
-            <a:ext cx="3473640" cy="510840"/>
+            <a:ext cx="3473280" cy="510480"/>
           </a:xfrm>
           <a:prstGeom prst="rect">
             <a:avLst/>
@@ -24351,7 +24291,7 @@
         <p:spPr>
           <a:xfrm>
             <a:off x="320040" y="2139840"/>
-            <a:ext cx="8502840" cy="510840"/>
+            <a:ext cx="8502480" cy="510480"/>
           </a:xfrm>
           <a:prstGeom prst="rect">
             <a:avLst/>
@@ -24389,7 +24329,7 @@
         <p:spPr>
           <a:xfrm>
             <a:off x="320040" y="2139840"/>
-            <a:ext cx="72000" cy="510840"/>
+            <a:ext cx="71640" cy="510480"/>
           </a:xfrm>
           <a:prstGeom prst="rect">
             <a:avLst/>
@@ -24420,7 +24360,7 @@
         <p:spPr>
           <a:xfrm>
             <a:off x="457200" y="2139840"/>
-            <a:ext cx="1964880" cy="510840"/>
+            <a:ext cx="1964520" cy="510480"/>
           </a:xfrm>
           <a:prstGeom prst="rect">
             <a:avLst/>
@@ -24475,7 +24415,7 @@
         <p:spPr>
           <a:xfrm>
             <a:off x="2468880" y="2139840"/>
-            <a:ext cx="2696400" cy="510840"/>
+            <a:ext cx="2696040" cy="510480"/>
           </a:xfrm>
           <a:prstGeom prst="rect">
             <a:avLst/>
@@ -24530,7 +24470,7 @@
         <p:spPr>
           <a:xfrm>
             <a:off x="5212080" y="2139840"/>
-            <a:ext cx="3473640" cy="510840"/>
+            <a:ext cx="3473280" cy="510480"/>
           </a:xfrm>
           <a:prstGeom prst="rect">
             <a:avLst/>
@@ -24585,7 +24525,7 @@
         <p:spPr>
           <a:xfrm>
             <a:off x="320040" y="2706480"/>
-            <a:ext cx="8502840" cy="510840"/>
+            <a:ext cx="8502480" cy="510480"/>
           </a:xfrm>
           <a:prstGeom prst="rect">
             <a:avLst/>
@@ -24623,7 +24563,7 @@
         <p:spPr>
           <a:xfrm>
             <a:off x="320040" y="2706480"/>
-            <a:ext cx="72000" cy="510840"/>
+            <a:ext cx="71640" cy="510480"/>
           </a:xfrm>
           <a:prstGeom prst="rect">
             <a:avLst/>
@@ -24654,7 +24594,7 @@
         <p:spPr>
           <a:xfrm>
             <a:off x="457200" y="2706480"/>
-            <a:ext cx="1964880" cy="510840"/>
+            <a:ext cx="1964520" cy="510480"/>
           </a:xfrm>
           <a:prstGeom prst="rect">
             <a:avLst/>
@@ -24709,7 +24649,7 @@
         <p:spPr>
           <a:xfrm>
             <a:off x="2468880" y="2706480"/>
-            <a:ext cx="2696400" cy="510840"/>
+            <a:ext cx="2696040" cy="510480"/>
           </a:xfrm>
           <a:prstGeom prst="rect">
             <a:avLst/>
@@ -24764,7 +24704,7 @@
         <p:spPr>
           <a:xfrm>
             <a:off x="5212080" y="2706480"/>
-            <a:ext cx="3473640" cy="510840"/>
+            <a:ext cx="3473280" cy="510480"/>
           </a:xfrm>
           <a:prstGeom prst="rect">
             <a:avLst/>
@@ -24819,7 +24759,7 @@
         <p:spPr>
           <a:xfrm>
             <a:off x="320040" y="3273480"/>
-            <a:ext cx="8502840" cy="510840"/>
+            <a:ext cx="8502480" cy="510480"/>
           </a:xfrm>
           <a:prstGeom prst="rect">
             <a:avLst/>
@@ -24857,7 +24797,7 @@
         <p:spPr>
           <a:xfrm>
             <a:off x="320040" y="3273480"/>
-            <a:ext cx="72000" cy="510840"/>
+            <a:ext cx="71640" cy="510480"/>
           </a:xfrm>
           <a:prstGeom prst="rect">
             <a:avLst/>
@@ -24888,7 +24828,7 @@
         <p:spPr>
           <a:xfrm>
             <a:off x="457200" y="3273480"/>
-            <a:ext cx="1964880" cy="510840"/>
+            <a:ext cx="1964520" cy="510480"/>
           </a:xfrm>
           <a:prstGeom prst="rect">
             <a:avLst/>
@@ -24943,7 +24883,7 @@
         <p:spPr>
           <a:xfrm>
             <a:off x="2468880" y="3273480"/>
-            <a:ext cx="2696400" cy="510840"/>
+            <a:ext cx="2696040" cy="510480"/>
           </a:xfrm>
           <a:prstGeom prst="rect">
             <a:avLst/>
@@ -24998,7 +24938,7 @@
         <p:spPr>
           <a:xfrm>
             <a:off x="5212080" y="3273480"/>
-            <a:ext cx="3473640" cy="510840"/>
+            <a:ext cx="3473280" cy="510480"/>
           </a:xfrm>
           <a:prstGeom prst="rect">
             <a:avLst/>
@@ -25053,7 +24993,7 @@
         <p:spPr>
           <a:xfrm>
             <a:off x="320040" y="3840480"/>
-            <a:ext cx="8502840" cy="510840"/>
+            <a:ext cx="8502480" cy="510480"/>
           </a:xfrm>
           <a:prstGeom prst="rect">
             <a:avLst/>
@@ -25091,7 +25031,7 @@
         <p:spPr>
           <a:xfrm>
             <a:off x="320040" y="3840480"/>
-            <a:ext cx="72000" cy="510840"/>
+            <a:ext cx="71640" cy="510480"/>
           </a:xfrm>
           <a:prstGeom prst="rect">
             <a:avLst/>
@@ -25122,7 +25062,7 @@
         <p:spPr>
           <a:xfrm>
             <a:off x="457200" y="3840480"/>
-            <a:ext cx="1964880" cy="510840"/>
+            <a:ext cx="1964520" cy="510480"/>
           </a:xfrm>
           <a:prstGeom prst="rect">
             <a:avLst/>
@@ -25177,7 +25117,7 @@
         <p:spPr>
           <a:xfrm>
             <a:off x="2468880" y="3840480"/>
-            <a:ext cx="2696400" cy="510840"/>
+            <a:ext cx="2696040" cy="510480"/>
           </a:xfrm>
           <a:prstGeom prst="rect">
             <a:avLst/>
@@ -25232,7 +25172,7 @@
         <p:spPr>
           <a:xfrm>
             <a:off x="5212080" y="3840480"/>
-            <a:ext cx="3473640" cy="510840"/>
+            <a:ext cx="3473280" cy="510480"/>
           </a:xfrm>
           <a:prstGeom prst="rect">
             <a:avLst/>
@@ -25287,7 +25227,7 @@
         <p:spPr>
           <a:xfrm>
             <a:off x="320040" y="4407480"/>
-            <a:ext cx="8502840" cy="510840"/>
+            <a:ext cx="8502480" cy="510480"/>
           </a:xfrm>
           <a:prstGeom prst="rect">
             <a:avLst/>
@@ -25325,7 +25265,7 @@
         <p:spPr>
           <a:xfrm>
             <a:off x="320040" y="4407480"/>
-            <a:ext cx="72000" cy="510840"/>
+            <a:ext cx="71640" cy="510480"/>
           </a:xfrm>
           <a:prstGeom prst="rect">
             <a:avLst/>
@@ -25356,7 +25296,7 @@
         <p:spPr>
           <a:xfrm>
             <a:off x="457200" y="4407480"/>
-            <a:ext cx="1964880" cy="510840"/>
+            <a:ext cx="1964520" cy="510480"/>
           </a:xfrm>
           <a:prstGeom prst="rect">
             <a:avLst/>
@@ -25411,7 +25351,7 @@
         <p:spPr>
           <a:xfrm>
             <a:off x="2468880" y="4407480"/>
-            <a:ext cx="2696400" cy="510840"/>
+            <a:ext cx="2696040" cy="510480"/>
           </a:xfrm>
           <a:prstGeom prst="rect">
             <a:avLst/>
@@ -25466,7 +25406,7 @@
         <p:spPr>
           <a:xfrm>
             <a:off x="5212080" y="4407480"/>
-            <a:ext cx="3473640" cy="510840"/>
+            <a:ext cx="3473280" cy="510480"/>
           </a:xfrm>
           <a:prstGeom prst="rect">
             <a:avLst/>
@@ -25521,7 +25461,7 @@
         <p:spPr>
           <a:xfrm>
             <a:off x="320040" y="4773240"/>
-            <a:ext cx="8502840" cy="273240"/>
+            <a:ext cx="8502480" cy="272880"/>
           </a:xfrm>
           <a:prstGeom prst="rect">
             <a:avLst/>
@@ -25559,7 +25499,7 @@
         <p:spPr>
           <a:xfrm>
             <a:off x="320040" y="4773240"/>
-            <a:ext cx="90360" cy="273240"/>
+            <a:ext cx="90000" cy="272880"/>
           </a:xfrm>
           <a:prstGeom prst="rect">
             <a:avLst/>
@@ -25590,7 +25530,7 @@
         <p:spPr>
           <a:xfrm>
             <a:off x="360000" y="5143680"/>
-            <a:ext cx="8228520" cy="273240"/>
+            <a:ext cx="8228160" cy="272880"/>
           </a:xfrm>
           <a:prstGeom prst="rect">
             <a:avLst/>
@@ -25692,7 +25632,7 @@
         <p:spPr>
           <a:xfrm>
             <a:off x="0" y="0"/>
-            <a:ext cx="9142920" cy="1004760"/>
+            <a:ext cx="9142560" cy="1004400"/>
           </a:xfrm>
           <a:prstGeom prst="rect">
             <a:avLst/>
@@ -25723,7 +25663,7 @@
         <p:spPr>
           <a:xfrm>
             <a:off x="0" y="0"/>
-            <a:ext cx="108720" cy="1004760"/>
+            <a:ext cx="108360" cy="1004400"/>
           </a:xfrm>
           <a:prstGeom prst="rect">
             <a:avLst/>
@@ -25754,7 +25694,7 @@
         <p:spPr>
           <a:xfrm>
             <a:off x="255960" y="128160"/>
-            <a:ext cx="8502840" cy="547560"/>
+            <a:ext cx="8502480" cy="547200"/>
           </a:xfrm>
           <a:prstGeom prst="rect">
             <a:avLst/>
@@ -25809,7 +25749,7 @@
         <p:spPr>
           <a:xfrm>
             <a:off x="255960" y="658440"/>
-            <a:ext cx="8502840" cy="273240"/>
+            <a:ext cx="8502480" cy="272880"/>
           </a:xfrm>
           <a:prstGeom prst="rect">
             <a:avLst/>
@@ -25864,7 +25804,7 @@
         <p:spPr>
           <a:xfrm>
             <a:off x="320040" y="1143000"/>
-            <a:ext cx="8502840" cy="1599120"/>
+            <a:ext cx="8502480" cy="1598760"/>
           </a:xfrm>
           <a:prstGeom prst="rect">
             <a:avLst/>
@@ -25902,7 +25842,7 @@
         <p:spPr>
           <a:xfrm>
             <a:off x="457200" y="1234440"/>
-            <a:ext cx="8045640" cy="273240"/>
+            <a:ext cx="8045280" cy="272880"/>
           </a:xfrm>
           <a:prstGeom prst="rect">
             <a:avLst/>
@@ -25957,7 +25897,7 @@
         <p:spPr>
           <a:xfrm>
             <a:off x="365760" y="1536120"/>
-            <a:ext cx="8457120" cy="1206000"/>
+            <a:ext cx="8456760" cy="1205640"/>
           </a:xfrm>
           <a:prstGeom prst="rect">
             <a:avLst/>
@@ -25988,7 +25928,7 @@
         <p:spPr>
           <a:xfrm>
             <a:off x="365760" y="1536120"/>
-            <a:ext cx="565920" cy="200160"/>
+            <a:ext cx="565560" cy="199800"/>
           </a:xfrm>
           <a:prstGeom prst="rect">
             <a:avLst/>
@@ -26019,7 +25959,7 @@
         <p:spPr>
           <a:xfrm>
             <a:off x="365760" y="1536120"/>
-            <a:ext cx="565920" cy="200160"/>
+            <a:ext cx="565560" cy="199800"/>
           </a:xfrm>
           <a:prstGeom prst="rect">
             <a:avLst/>
@@ -26074,7 +26014,7 @@
         <p:spPr>
           <a:xfrm>
             <a:off x="457200" y="1792080"/>
-            <a:ext cx="8228520" cy="812880"/>
+            <a:ext cx="8228160" cy="812520"/>
           </a:xfrm>
           <a:prstGeom prst="rect">
             <a:avLst/>
@@ -26225,7 +26165,7 @@
         <p:spPr>
           <a:xfrm>
             <a:off x="320040" y="2853000"/>
-            <a:ext cx="2028960" cy="1050480"/>
+            <a:ext cx="2028600" cy="1050120"/>
           </a:xfrm>
           <a:prstGeom prst="rect">
             <a:avLst/>
@@ -26263,7 +26203,7 @@
         <p:spPr>
           <a:xfrm>
             <a:off x="320040" y="2853000"/>
-            <a:ext cx="2028960" cy="53640"/>
+            <a:ext cx="2028600" cy="53280"/>
           </a:xfrm>
           <a:prstGeom prst="rect">
             <a:avLst/>
@@ -26294,7 +26234,7 @@
         <p:spPr>
           <a:xfrm>
             <a:off x="548640" y="2962800"/>
-            <a:ext cx="346320" cy="346320"/>
+            <a:ext cx="345960" cy="345960"/>
           </a:xfrm>
           <a:prstGeom prst="ellipse">
             <a:avLst/>
@@ -26325,7 +26265,7 @@
         <p:spPr>
           <a:xfrm>
             <a:off x="548640" y="2962800"/>
-            <a:ext cx="346320" cy="346320"/>
+            <a:ext cx="345960" cy="345960"/>
           </a:xfrm>
           <a:prstGeom prst="rect">
             <a:avLst/>
@@ -26380,7 +26320,7 @@
         <p:spPr>
           <a:xfrm>
             <a:off x="969120" y="2907720"/>
-            <a:ext cx="1260720" cy="931680"/>
+            <a:ext cx="1260360" cy="931320"/>
           </a:xfrm>
           <a:prstGeom prst="rect">
             <a:avLst/>
@@ -26435,7 +26375,7 @@
         <p:spPr>
           <a:xfrm>
             <a:off x="2350080" y="3246120"/>
-            <a:ext cx="145080" cy="364680"/>
+            <a:ext cx="144720" cy="364320"/>
           </a:xfrm>
           <a:prstGeom prst="rect">
             <a:avLst/>
@@ -26490,7 +26430,7 @@
         <p:spPr>
           <a:xfrm>
             <a:off x="2514600" y="2853000"/>
-            <a:ext cx="2028960" cy="1050480"/>
+            <a:ext cx="2028600" cy="1050120"/>
           </a:xfrm>
           <a:prstGeom prst="rect">
             <a:avLst/>
@@ -26528,7 +26468,7 @@
         <p:spPr>
           <a:xfrm>
             <a:off x="2514600" y="2853000"/>
-            <a:ext cx="2028960" cy="53640"/>
+            <a:ext cx="2028600" cy="53280"/>
           </a:xfrm>
           <a:prstGeom prst="rect">
             <a:avLst/>
@@ -26559,7 +26499,7 @@
         <p:spPr>
           <a:xfrm>
             <a:off x="2743200" y="2962800"/>
-            <a:ext cx="346320" cy="346320"/>
+            <a:ext cx="345960" cy="345960"/>
           </a:xfrm>
           <a:prstGeom prst="ellipse">
             <a:avLst/>
@@ -26590,7 +26530,7 @@
         <p:spPr>
           <a:xfrm>
             <a:off x="2743200" y="2962800"/>
-            <a:ext cx="346320" cy="346320"/>
+            <a:ext cx="345960" cy="345960"/>
           </a:xfrm>
           <a:prstGeom prst="rect">
             <a:avLst/>
@@ -26645,7 +26585,7 @@
         <p:spPr>
           <a:xfrm>
             <a:off x="3163680" y="2907720"/>
-            <a:ext cx="1260720" cy="931680"/>
+            <a:ext cx="1260360" cy="931320"/>
           </a:xfrm>
           <a:prstGeom prst="rect">
             <a:avLst/>
@@ -26700,7 +26640,7 @@
         <p:spPr>
           <a:xfrm>
             <a:off x="4544640" y="3246120"/>
-            <a:ext cx="145080" cy="364680"/>
+            <a:ext cx="144720" cy="364320"/>
           </a:xfrm>
           <a:prstGeom prst="rect">
             <a:avLst/>
@@ -26755,7 +26695,7 @@
         <p:spPr>
           <a:xfrm>
             <a:off x="4709160" y="2853000"/>
-            <a:ext cx="2028960" cy="1050480"/>
+            <a:ext cx="2028600" cy="1050120"/>
           </a:xfrm>
           <a:prstGeom prst="rect">
             <a:avLst/>
@@ -26793,7 +26733,7 @@
         <p:spPr>
           <a:xfrm>
             <a:off x="4709160" y="2853000"/>
-            <a:ext cx="2028960" cy="53640"/>
+            <a:ext cx="2028600" cy="53280"/>
           </a:xfrm>
           <a:prstGeom prst="rect">
             <a:avLst/>
@@ -26824,7 +26764,7 @@
         <p:spPr>
           <a:xfrm>
             <a:off x="4937760" y="2962800"/>
-            <a:ext cx="346320" cy="346320"/>
+            <a:ext cx="345960" cy="345960"/>
           </a:xfrm>
           <a:prstGeom prst="ellipse">
             <a:avLst/>
@@ -26855,7 +26795,7 @@
         <p:spPr>
           <a:xfrm>
             <a:off x="4937760" y="2962800"/>
-            <a:ext cx="346320" cy="346320"/>
+            <a:ext cx="345960" cy="345960"/>
           </a:xfrm>
           <a:prstGeom prst="rect">
             <a:avLst/>
@@ -26910,7 +26850,7 @@
         <p:spPr>
           <a:xfrm>
             <a:off x="5358240" y="2907720"/>
-            <a:ext cx="1260720" cy="931680"/>
+            <a:ext cx="1260360" cy="931320"/>
           </a:xfrm>
           <a:prstGeom prst="rect">
             <a:avLst/>
@@ -26965,7 +26905,7 @@
         <p:spPr>
           <a:xfrm>
             <a:off x="6739200" y="3246120"/>
-            <a:ext cx="145080" cy="364680"/>
+            <a:ext cx="144720" cy="364320"/>
           </a:xfrm>
           <a:prstGeom prst="rect">
             <a:avLst/>
@@ -27020,7 +26960,7 @@
         <p:spPr>
           <a:xfrm>
             <a:off x="6903720" y="2853000"/>
-            <a:ext cx="2028960" cy="1050480"/>
+            <a:ext cx="2028600" cy="1050120"/>
           </a:xfrm>
           <a:prstGeom prst="rect">
             <a:avLst/>
@@ -27058,7 +26998,7 @@
         <p:spPr>
           <a:xfrm>
             <a:off x="6903720" y="2853000"/>
-            <a:ext cx="2028960" cy="53640"/>
+            <a:ext cx="2028600" cy="53280"/>
           </a:xfrm>
           <a:prstGeom prst="rect">
             <a:avLst/>
@@ -27089,7 +27029,7 @@
         <p:spPr>
           <a:xfrm>
             <a:off x="7132320" y="2962800"/>
-            <a:ext cx="346320" cy="346320"/>
+            <a:ext cx="345960" cy="345960"/>
           </a:xfrm>
           <a:prstGeom prst="ellipse">
             <a:avLst/>
@@ -27120,7 +27060,7 @@
         <p:spPr>
           <a:xfrm>
             <a:off x="7132320" y="2962800"/>
-            <a:ext cx="346320" cy="346320"/>
+            <a:ext cx="345960" cy="345960"/>
           </a:xfrm>
           <a:prstGeom prst="rect">
             <a:avLst/>
@@ -27175,7 +27115,7 @@
         <p:spPr>
           <a:xfrm>
             <a:off x="7552800" y="2907720"/>
-            <a:ext cx="1260720" cy="931680"/>
+            <a:ext cx="1260360" cy="931320"/>
           </a:xfrm>
           <a:prstGeom prst="rect">
             <a:avLst/>
@@ -27230,7 +27170,7 @@
         <p:spPr>
           <a:xfrm>
             <a:off x="320040" y="4005000"/>
-            <a:ext cx="8502840" cy="684720"/>
+            <a:ext cx="8502480" cy="684360"/>
           </a:xfrm>
           <a:prstGeom prst="rect">
             <a:avLst/>
@@ -27268,7 +27208,7 @@
         <p:spPr>
           <a:xfrm>
             <a:off x="320040" y="4005000"/>
-            <a:ext cx="8502840" cy="63000"/>
+            <a:ext cx="8502480" cy="62640"/>
           </a:xfrm>
           <a:prstGeom prst="rect">
             <a:avLst/>
@@ -27299,7 +27239,7 @@
         <p:spPr>
           <a:xfrm>
             <a:off x="457200" y="4096440"/>
-            <a:ext cx="3199320" cy="254880"/>
+            <a:ext cx="3198960" cy="254520"/>
           </a:xfrm>
           <a:prstGeom prst="rect">
             <a:avLst/>
@@ -27354,7 +27294,7 @@
         <p:spPr>
           <a:xfrm>
             <a:off x="365760" y="4370760"/>
-            <a:ext cx="8411400" cy="254880"/>
+            <a:ext cx="8411040" cy="254520"/>
           </a:xfrm>
           <a:prstGeom prst="rect">
             <a:avLst/>
@@ -27385,7 +27325,7 @@
         <p:spPr>
           <a:xfrm>
             <a:off x="365760" y="4370760"/>
-            <a:ext cx="565920" cy="200160"/>
+            <a:ext cx="565560" cy="199800"/>
           </a:xfrm>
           <a:prstGeom prst="rect">
             <a:avLst/>
@@ -27416,7 +27356,7 @@
         <p:spPr>
           <a:xfrm>
             <a:off x="365760" y="4370760"/>
-            <a:ext cx="565920" cy="200160"/>
+            <a:ext cx="565560" cy="199800"/>
           </a:xfrm>
           <a:prstGeom prst="rect">
             <a:avLst/>
@@ -27471,24 +27411,24 @@
         <p:spPr>
           <a:xfrm>
             <a:off x="457200" y="4581360"/>
-            <a:ext cx="8228520" cy="44640"/>
-          </a:xfrm>
-          <a:prstGeom prst="rect">
-            <a:avLst/>
-          </a:prstGeom>
-          <a:noFill/>
-          <a:ln w="0">
-            <a:noFill/>
-          </a:ln>
-        </p:spPr>
-        <p:style>
-          <a:lnRef idx="0"/>
-          <a:fillRef idx="0"/>
-          <a:effectRef idx="0"/>
-          <a:fontRef idx="minor"/>
-        </p:style>
-        <p:txBody>
-          <a:bodyPr lIns="90000" rIns="90000" tIns="45360" bIns="45360" anchor="t">
+            <a:ext cx="8228160" cy="44280"/>
+          </a:xfrm>
+          <a:prstGeom prst="rect">
+            <a:avLst/>
+          </a:prstGeom>
+          <a:noFill/>
+          <a:ln w="0">
+            <a:noFill/>
+          </a:ln>
+        </p:spPr>
+        <p:style>
+          <a:lnRef idx="0"/>
+          <a:fillRef idx="0"/>
+          <a:effectRef idx="0"/>
+          <a:fontRef idx="minor"/>
+        </p:style>
+        <p:txBody>
+          <a:bodyPr lIns="90000" rIns="90000" tIns="44640" bIns="44640" anchor="t">
             <a:noAutofit/>
           </a:bodyPr>
           <a:p>
@@ -27564,7 +27504,7 @@
         <p:spPr>
           <a:xfrm>
             <a:off x="180000" y="5760000"/>
-            <a:ext cx="8502840" cy="273240"/>
+            <a:ext cx="8502480" cy="272880"/>
           </a:xfrm>
           <a:prstGeom prst="rect">
             <a:avLst/>
@@ -27641,7 +27581,7 @@
         <p:spPr>
           <a:xfrm>
             <a:off x="320040" y="4773240"/>
-            <a:ext cx="90360" cy="273240"/>
+            <a:ext cx="90000" cy="272880"/>
           </a:xfrm>
           <a:prstGeom prst="rect">
             <a:avLst/>
@@ -27672,7 +27612,7 @@
         <p:spPr>
           <a:xfrm>
             <a:off x="231120" y="5306400"/>
-            <a:ext cx="8228520" cy="273240"/>
+            <a:ext cx="8228160" cy="272880"/>
           </a:xfrm>
           <a:prstGeom prst="rect">
             <a:avLst/>
@@ -27774,7 +27714,7 @@
         <p:spPr>
           <a:xfrm>
             <a:off x="0" y="0"/>
-            <a:ext cx="9142920" cy="1004760"/>
+            <a:ext cx="9142560" cy="1004400"/>
           </a:xfrm>
           <a:prstGeom prst="rect">
             <a:avLst/>
@@ -27805,7 +27745,7 @@
         <p:spPr>
           <a:xfrm>
             <a:off x="0" y="0"/>
-            <a:ext cx="108720" cy="1004760"/>
+            <a:ext cx="108360" cy="1004400"/>
           </a:xfrm>
           <a:prstGeom prst="rect">
             <a:avLst/>
@@ -27836,7 +27776,7 @@
         <p:spPr>
           <a:xfrm>
             <a:off x="255960" y="128160"/>
-            <a:ext cx="8502840" cy="547560"/>
+            <a:ext cx="8502480" cy="547200"/>
           </a:xfrm>
           <a:prstGeom prst="rect">
             <a:avLst/>
@@ -27891,7 +27831,7 @@
         <p:spPr>
           <a:xfrm>
             <a:off x="255960" y="658440"/>
-            <a:ext cx="8502840" cy="273240"/>
+            <a:ext cx="8502480" cy="272880"/>
           </a:xfrm>
           <a:prstGeom prst="rect">
             <a:avLst/>
@@ -27946,7 +27886,7 @@
         <p:spPr>
           <a:xfrm>
             <a:off x="320040" y="1143000"/>
-            <a:ext cx="8502840" cy="1480320"/>
+            <a:ext cx="8502480" cy="1479960"/>
           </a:xfrm>
           <a:prstGeom prst="rect">
             <a:avLst/>
@@ -27984,7 +27924,7 @@
         <p:spPr>
           <a:xfrm>
             <a:off x="457200" y="1234440"/>
-            <a:ext cx="8045640" cy="273240"/>
+            <a:ext cx="8045280" cy="272880"/>
           </a:xfrm>
           <a:prstGeom prst="rect">
             <a:avLst/>
@@ -28039,7 +27979,7 @@
         <p:spPr>
           <a:xfrm>
             <a:off x="365760" y="1536120"/>
-            <a:ext cx="8411400" cy="1004760"/>
+            <a:ext cx="8411040" cy="1004400"/>
           </a:xfrm>
           <a:prstGeom prst="rect">
             <a:avLst/>
@@ -28070,7 +28010,7 @@
         <p:spPr>
           <a:xfrm>
             <a:off x="365760" y="1536120"/>
-            <a:ext cx="565920" cy="200160"/>
+            <a:ext cx="565560" cy="199800"/>
           </a:xfrm>
           <a:prstGeom prst="rect">
             <a:avLst/>
@@ -28101,7 +28041,7 @@
         <p:spPr>
           <a:xfrm>
             <a:off x="365760" y="1536120"/>
-            <a:ext cx="565920" cy="200160"/>
+            <a:ext cx="565560" cy="199800"/>
           </a:xfrm>
           <a:prstGeom prst="rect">
             <a:avLst/>
@@ -28156,7 +28096,7 @@
         <p:spPr>
           <a:xfrm>
             <a:off x="457200" y="1792080"/>
-            <a:ext cx="8228520" cy="703080"/>
+            <a:ext cx="8228160" cy="702720"/>
           </a:xfrm>
           <a:prstGeom prst="rect">
             <a:avLst/>
@@ -28297,7 +28237,7 @@
         <p:spPr>
           <a:xfrm>
             <a:off x="320040" y="2724840"/>
-            <a:ext cx="8502840" cy="867600"/>
+            <a:ext cx="8502480" cy="867240"/>
           </a:xfrm>
           <a:prstGeom prst="rect">
             <a:avLst/>
@@ -28335,7 +28275,7 @@
         <p:spPr>
           <a:xfrm>
             <a:off x="320040" y="2724840"/>
-            <a:ext cx="8502840" cy="72000"/>
+            <a:ext cx="8502480" cy="71640"/>
           </a:xfrm>
           <a:prstGeom prst="rect">
             <a:avLst/>
@@ -28366,7 +28306,7 @@
         <p:spPr>
           <a:xfrm>
             <a:off x="457200" y="2834640"/>
-            <a:ext cx="913320" cy="474480"/>
+            <a:ext cx="912960" cy="474120"/>
           </a:xfrm>
           <a:prstGeom prst="rect">
             <a:avLst/>
@@ -28421,7 +28361,7 @@
         <p:spPr>
           <a:xfrm>
             <a:off x="1371600" y="2834640"/>
-            <a:ext cx="7268400" cy="657360"/>
+            <a:ext cx="7268040" cy="657000"/>
           </a:xfrm>
           <a:prstGeom prst="rect">
             <a:avLst/>
@@ -28476,7 +28416,7 @@
         <p:spPr>
           <a:xfrm>
             <a:off x="320040" y="3703320"/>
-            <a:ext cx="4095360" cy="1297440"/>
+            <a:ext cx="4095000" cy="1297080"/>
           </a:xfrm>
           <a:prstGeom prst="rect">
             <a:avLst/>
@@ -28514,7 +28454,7 @@
         <p:spPr>
           <a:xfrm>
             <a:off x="457200" y="3794760"/>
-            <a:ext cx="3747960" cy="254880"/>
+            <a:ext cx="3747600" cy="254520"/>
           </a:xfrm>
           <a:prstGeom prst="rect">
             <a:avLst/>
@@ -28569,7 +28509,7 @@
         <p:spPr>
           <a:xfrm>
             <a:off x="457200" y="4096440"/>
-            <a:ext cx="3747960" cy="821880"/>
+            <a:ext cx="3747600" cy="821520"/>
           </a:xfrm>
           <a:prstGeom prst="rect">
             <a:avLst/>
@@ -28650,7 +28590,7 @@
         <p:spPr>
           <a:xfrm>
             <a:off x="4727520" y="3703320"/>
-            <a:ext cx="4095360" cy="1297440"/>
+            <a:ext cx="4095000" cy="1297080"/>
           </a:xfrm>
           <a:prstGeom prst="rect">
             <a:avLst/>
@@ -28688,7 +28628,7 @@
         <p:spPr>
           <a:xfrm>
             <a:off x="4864680" y="3794760"/>
-            <a:ext cx="3747960" cy="254880"/>
+            <a:ext cx="3747600" cy="254520"/>
           </a:xfrm>
           <a:prstGeom prst="rect">
             <a:avLst/>
@@ -28743,7 +28683,7 @@
         <p:spPr>
           <a:xfrm>
             <a:off x="4864680" y="4096440"/>
-            <a:ext cx="3747960" cy="821880"/>
+            <a:ext cx="3747600" cy="821520"/>
           </a:xfrm>
           <a:prstGeom prst="rect">
             <a:avLst/>
@@ -28824,7 +28764,7 @@
         <p:spPr>
           <a:xfrm>
             <a:off x="320040" y="4773240"/>
-            <a:ext cx="8502840" cy="273240"/>
+            <a:ext cx="8502480" cy="272880"/>
           </a:xfrm>
           <a:prstGeom prst="rect">
             <a:avLst/>
@@ -28862,7 +28802,7 @@
         <p:spPr>
           <a:xfrm>
             <a:off x="320040" y="4773240"/>
-            <a:ext cx="90360" cy="273240"/>
+            <a:ext cx="90000" cy="272880"/>
           </a:xfrm>
           <a:prstGeom prst="rect">
             <a:avLst/>
@@ -28893,7 +28833,7 @@
         <p:spPr>
           <a:xfrm>
             <a:off x="502920" y="4773240"/>
-            <a:ext cx="8228520" cy="273240"/>
+            <a:ext cx="8228160" cy="272880"/>
           </a:xfrm>
           <a:prstGeom prst="rect">
             <a:avLst/>
@@ -28995,7 +28935,7 @@
         <p:spPr>
           <a:xfrm>
             <a:off x="0" y="0"/>
-            <a:ext cx="9142920" cy="1004760"/>
+            <a:ext cx="9142560" cy="1004400"/>
           </a:xfrm>
           <a:prstGeom prst="rect">
             <a:avLst/>
@@ -29026,7 +28966,7 @@
         <p:spPr>
           <a:xfrm>
             <a:off x="0" y="0"/>
-            <a:ext cx="108720" cy="1004760"/>
+            <a:ext cx="108360" cy="1004400"/>
           </a:xfrm>
           <a:prstGeom prst="rect">
             <a:avLst/>
@@ -29057,7 +28997,7 @@
         <p:spPr>
           <a:xfrm>
             <a:off x="255960" y="128160"/>
-            <a:ext cx="8502840" cy="547560"/>
+            <a:ext cx="8502480" cy="547200"/>
           </a:xfrm>
           <a:prstGeom prst="rect">
             <a:avLst/>
@@ -29112,7 +29052,7 @@
         <p:spPr>
           <a:xfrm>
             <a:off x="255960" y="658440"/>
-            <a:ext cx="8502840" cy="273240"/>
+            <a:ext cx="8502480" cy="272880"/>
           </a:xfrm>
           <a:prstGeom prst="rect">
             <a:avLst/>
@@ -29167,7 +29107,7 @@
         <p:spPr>
           <a:xfrm>
             <a:off x="320040" y="1143000"/>
-            <a:ext cx="4113720" cy="3656520"/>
+            <a:ext cx="4113360" cy="3656160"/>
           </a:xfrm>
           <a:prstGeom prst="rect">
             <a:avLst/>
@@ -29205,7 +29145,7 @@
         <p:spPr>
           <a:xfrm>
             <a:off x="320040" y="1143000"/>
-            <a:ext cx="4113720" cy="383040"/>
+            <a:ext cx="4113360" cy="382680"/>
           </a:xfrm>
           <a:prstGeom prst="rect">
             <a:avLst/>
@@ -29236,7 +29176,7 @@
         <p:spPr>
           <a:xfrm>
             <a:off x="457200" y="1143000"/>
-            <a:ext cx="3839400" cy="383040"/>
+            <a:ext cx="3839040" cy="382680"/>
           </a:xfrm>
           <a:prstGeom prst="rect">
             <a:avLst/>
@@ -29291,7 +29231,7 @@
         <p:spPr>
           <a:xfrm>
             <a:off x="457200" y="1581840"/>
-            <a:ext cx="3839400" cy="474480"/>
+            <a:ext cx="3839040" cy="474120"/>
           </a:xfrm>
           <a:prstGeom prst="rect">
             <a:avLst/>
@@ -29370,7 +29310,7 @@
         <p:spPr>
           <a:xfrm>
             <a:off x="365760" y="2103120"/>
-            <a:ext cx="4003920" cy="2577600"/>
+            <a:ext cx="4003560" cy="2577240"/>
           </a:xfrm>
           <a:prstGeom prst="rect">
             <a:avLst/>
@@ -29401,7 +29341,7 @@
         <p:spPr>
           <a:xfrm>
             <a:off x="365760" y="2103120"/>
-            <a:ext cx="565920" cy="200160"/>
+            <a:ext cx="565560" cy="199800"/>
           </a:xfrm>
           <a:prstGeom prst="rect">
             <a:avLst/>
@@ -29432,7 +29372,7 @@
         <p:spPr>
           <a:xfrm>
             <a:off x="365760" y="2103120"/>
-            <a:ext cx="565920" cy="200160"/>
+            <a:ext cx="565560" cy="199800"/>
           </a:xfrm>
           <a:prstGeom prst="rect">
             <a:avLst/>
@@ -29487,7 +29427,7 @@
         <p:spPr>
           <a:xfrm>
             <a:off x="457200" y="2359080"/>
-            <a:ext cx="3821040" cy="2275920"/>
+            <a:ext cx="3820680" cy="2275560"/>
           </a:xfrm>
           <a:prstGeom prst="rect">
             <a:avLst/>
@@ -29740,7 +29680,7 @@
         <p:spPr>
           <a:xfrm>
             <a:off x="4709160" y="1143000"/>
-            <a:ext cx="4113720" cy="3656520"/>
+            <a:ext cx="4113360" cy="3656160"/>
           </a:xfrm>
           <a:prstGeom prst="rect">
             <a:avLst/>
@@ -29778,7 +29718,7 @@
         <p:spPr>
           <a:xfrm>
             <a:off x="4709160" y="1143000"/>
-            <a:ext cx="4113720" cy="383040"/>
+            <a:ext cx="4113360" cy="382680"/>
           </a:xfrm>
           <a:prstGeom prst="rect">
             <a:avLst/>
@@ -29809,7 +29749,7 @@
         <p:spPr>
           <a:xfrm>
             <a:off x="4846320" y="1143000"/>
-            <a:ext cx="3839400" cy="383040"/>
+            <a:ext cx="3839040" cy="382680"/>
           </a:xfrm>
           <a:prstGeom prst="rect">
             <a:avLst/>
@@ -29864,7 +29804,7 @@
         <p:spPr>
           <a:xfrm>
             <a:off x="4846320" y="1581840"/>
-            <a:ext cx="3839400" cy="474480"/>
+            <a:ext cx="3839040" cy="474120"/>
           </a:xfrm>
           <a:prstGeom prst="rect">
             <a:avLst/>
@@ -29943,7 +29883,7 @@
         <p:spPr>
           <a:xfrm>
             <a:off x="4754880" y="2103120"/>
-            <a:ext cx="4003920" cy="2577600"/>
+            <a:ext cx="4003560" cy="2577240"/>
           </a:xfrm>
           <a:prstGeom prst="rect">
             <a:avLst/>
@@ -29974,7 +29914,7 @@
         <p:spPr>
           <a:xfrm>
             <a:off x="4754880" y="2103120"/>
-            <a:ext cx="565920" cy="200160"/>
+            <a:ext cx="565560" cy="199800"/>
           </a:xfrm>
           <a:prstGeom prst="rect">
             <a:avLst/>
@@ -30005,7 +29945,7 @@
         <p:spPr>
           <a:xfrm>
             <a:off x="4754880" y="2103120"/>
-            <a:ext cx="565920" cy="200160"/>
+            <a:ext cx="565560" cy="199800"/>
           </a:xfrm>
           <a:prstGeom prst="rect">
             <a:avLst/>
@@ -30060,7 +30000,7 @@
         <p:spPr>
           <a:xfrm>
             <a:off x="4846320" y="2359080"/>
-            <a:ext cx="3821040" cy="2275920"/>
+            <a:ext cx="3820680" cy="2275560"/>
           </a:xfrm>
           <a:prstGeom prst="rect">
             <a:avLst/>
@@ -30337,7 +30277,7 @@
         <p:spPr>
           <a:xfrm>
             <a:off x="320040" y="4773240"/>
-            <a:ext cx="8502840" cy="273240"/>
+            <a:ext cx="8502480" cy="272880"/>
           </a:xfrm>
           <a:prstGeom prst="rect">
             <a:avLst/>
@@ -30375,7 +30315,7 @@
         <p:spPr>
           <a:xfrm>
             <a:off x="320040" y="4773240"/>
-            <a:ext cx="90360" cy="273240"/>
+            <a:ext cx="90000" cy="272880"/>
           </a:xfrm>
           <a:prstGeom prst="rect">
             <a:avLst/>
@@ -30406,7 +30346,7 @@
         <p:spPr>
           <a:xfrm>
             <a:off x="502920" y="4773240"/>
-            <a:ext cx="8228520" cy="273240"/>
+            <a:ext cx="8228160" cy="272880"/>
           </a:xfrm>
           <a:prstGeom prst="rect">
             <a:avLst/>
@@ -30508,7 +30448,7 @@
         <p:spPr>
           <a:xfrm>
             <a:off x="0" y="0"/>
-            <a:ext cx="9142920" cy="1004760"/>
+            <a:ext cx="9142560" cy="1004400"/>
           </a:xfrm>
           <a:prstGeom prst="rect">
             <a:avLst/>
@@ -30539,7 +30479,7 @@
         <p:spPr>
           <a:xfrm>
             <a:off x="0" y="0"/>
-            <a:ext cx="108720" cy="1004760"/>
+            <a:ext cx="108360" cy="1004400"/>
           </a:xfrm>
           <a:prstGeom prst="rect">
             <a:avLst/>
@@ -30570,7 +30510,7 @@
         <p:spPr>
           <a:xfrm>
             <a:off x="255960" y="128160"/>
-            <a:ext cx="8502840" cy="547560"/>
+            <a:ext cx="8502480" cy="547200"/>
           </a:xfrm>
           <a:prstGeom prst="rect">
             <a:avLst/>
@@ -30625,7 +30565,7 @@
         <p:spPr>
           <a:xfrm>
             <a:off x="255960" y="658440"/>
-            <a:ext cx="8502840" cy="273240"/>
+            <a:ext cx="8502480" cy="272880"/>
           </a:xfrm>
           <a:prstGeom prst="rect">
             <a:avLst/>
@@ -30680,7 +30620,7 @@
         <p:spPr>
           <a:xfrm>
             <a:off x="320040" y="1143000"/>
-            <a:ext cx="4113720" cy="3656520"/>
+            <a:ext cx="4113360" cy="3656160"/>
           </a:xfrm>
           <a:prstGeom prst="rect">
             <a:avLst/>
@@ -30718,7 +30658,7 @@
         <p:spPr>
           <a:xfrm>
             <a:off x="457200" y="1261800"/>
-            <a:ext cx="3747960" cy="273240"/>
+            <a:ext cx="3747600" cy="272880"/>
           </a:xfrm>
           <a:prstGeom prst="rect">
             <a:avLst/>
@@ -30773,7 +30713,7 @@
         <p:spPr>
           <a:xfrm>
             <a:off x="457200" y="1572840"/>
-            <a:ext cx="3747960" cy="273240"/>
+            <a:ext cx="3747600" cy="272880"/>
           </a:xfrm>
           <a:prstGeom prst="rect">
             <a:avLst/>
@@ -30828,7 +30768,7 @@
         <p:spPr>
           <a:xfrm>
             <a:off x="365760" y="1883520"/>
-            <a:ext cx="4003920" cy="1827720"/>
+            <a:ext cx="4003560" cy="1827360"/>
           </a:xfrm>
           <a:prstGeom prst="rect">
             <a:avLst/>
@@ -30859,7 +30799,7 @@
         <p:spPr>
           <a:xfrm>
             <a:off x="365760" y="1883520"/>
-            <a:ext cx="565920" cy="200160"/>
+            <a:ext cx="565560" cy="199800"/>
           </a:xfrm>
           <a:prstGeom prst="rect">
             <a:avLst/>
@@ -30890,7 +30830,7 @@
         <p:spPr>
           <a:xfrm>
             <a:off x="365760" y="1883520"/>
-            <a:ext cx="565920" cy="200160"/>
+            <a:ext cx="565560" cy="199800"/>
           </a:xfrm>
           <a:prstGeom prst="rect">
             <a:avLst/>
@@ -30945,7 +30885,7 @@
         <p:spPr>
           <a:xfrm>
             <a:off x="457200" y="2139840"/>
-            <a:ext cx="3821040" cy="1526040"/>
+            <a:ext cx="3820680" cy="1525680"/>
           </a:xfrm>
           <a:prstGeom prst="rect">
             <a:avLst/>
@@ -31164,7 +31104,7 @@
         <p:spPr>
           <a:xfrm>
             <a:off x="457200" y="3749040"/>
-            <a:ext cx="3747960" cy="986400"/>
+            <a:ext cx="3747600" cy="986040"/>
           </a:xfrm>
           <a:prstGeom prst="rect">
             <a:avLst/>
@@ -31270,7 +31210,7 @@
         <p:spPr>
           <a:xfrm>
             <a:off x="4709160" y="1143000"/>
-            <a:ext cx="4113720" cy="3656520"/>
+            <a:ext cx="4113360" cy="3656160"/>
           </a:xfrm>
           <a:prstGeom prst="rect">
             <a:avLst/>
@@ -31308,7 +31248,7 @@
         <p:spPr>
           <a:xfrm>
             <a:off x="4846320" y="1261800"/>
-            <a:ext cx="3747960" cy="273240"/>
+            <a:ext cx="3747600" cy="272880"/>
           </a:xfrm>
           <a:prstGeom prst="rect">
             <a:avLst/>
@@ -31363,7 +31303,7 @@
         <p:spPr>
           <a:xfrm>
             <a:off x="4846320" y="1572840"/>
-            <a:ext cx="3747960" cy="273240"/>
+            <a:ext cx="3747600" cy="272880"/>
           </a:xfrm>
           <a:prstGeom prst="rect">
             <a:avLst/>
@@ -31418,7 +31358,7 @@
         <p:spPr>
           <a:xfrm>
             <a:off x="4846320" y="1883520"/>
-            <a:ext cx="3821040" cy="867600"/>
+            <a:ext cx="3820680" cy="867240"/>
           </a:xfrm>
           <a:prstGeom prst="rect">
             <a:avLst/>
@@ -31456,7 +31396,7 @@
         <p:spPr>
           <a:xfrm>
             <a:off x="4846320" y="1883520"/>
-            <a:ext cx="3821040" cy="63000"/>
+            <a:ext cx="3820680" cy="62640"/>
           </a:xfrm>
           <a:prstGeom prst="rect">
             <a:avLst/>
@@ -31487,7 +31427,7 @@
         <p:spPr>
           <a:xfrm>
             <a:off x="4983480" y="1947600"/>
-            <a:ext cx="3565080" cy="236520"/>
+            <a:ext cx="3564720" cy="236160"/>
           </a:xfrm>
           <a:prstGeom prst="rect">
             <a:avLst/>
@@ -31542,7 +31482,7 @@
         <p:spPr>
           <a:xfrm>
             <a:off x="4983480" y="2212920"/>
-            <a:ext cx="3565080" cy="474480"/>
+            <a:ext cx="3564720" cy="474120"/>
           </a:xfrm>
           <a:prstGeom prst="rect">
             <a:avLst/>
@@ -31597,7 +31537,7 @@
         <p:spPr>
           <a:xfrm>
             <a:off x="4754880" y="2788920"/>
-            <a:ext cx="4003920" cy="1900800"/>
+            <a:ext cx="4003560" cy="1900440"/>
           </a:xfrm>
           <a:prstGeom prst="rect">
             <a:avLst/>
@@ -31628,7 +31568,7 @@
         <p:spPr>
           <a:xfrm>
             <a:off x="4754880" y="2788920"/>
-            <a:ext cx="565920" cy="200160"/>
+            <a:ext cx="565560" cy="199800"/>
           </a:xfrm>
           <a:prstGeom prst="rect">
             <a:avLst/>
@@ -31659,7 +31599,7 @@
         <p:spPr>
           <a:xfrm>
             <a:off x="4754880" y="2788920"/>
-            <a:ext cx="565920" cy="200160"/>
+            <a:ext cx="565560" cy="199800"/>
           </a:xfrm>
           <a:prstGeom prst="rect">
             <a:avLst/>
@@ -31714,7 +31654,7 @@
         <p:spPr>
           <a:xfrm>
             <a:off x="4846320" y="3044880"/>
-            <a:ext cx="3821040" cy="1599120"/>
+            <a:ext cx="3820680" cy="1598760"/>
           </a:xfrm>
           <a:prstGeom prst="rect">
             <a:avLst/>
@@ -31943,7 +31883,7 @@
         <p:spPr>
           <a:xfrm>
             <a:off x="320040" y="4773240"/>
-            <a:ext cx="8502840" cy="273240"/>
+            <a:ext cx="8502480" cy="272880"/>
           </a:xfrm>
           <a:prstGeom prst="rect">
             <a:avLst/>
@@ -31981,7 +31921,7 @@
         <p:spPr>
           <a:xfrm>
             <a:off x="320040" y="4773240"/>
-            <a:ext cx="90360" cy="273240"/>
+            <a:ext cx="90000" cy="272880"/>
           </a:xfrm>
           <a:prstGeom prst="rect">
             <a:avLst/>
@@ -32012,7 +31952,7 @@
         <p:spPr>
           <a:xfrm>
             <a:off x="502920" y="4773240"/>
-            <a:ext cx="8228520" cy="273240"/>
+            <a:ext cx="8228160" cy="272880"/>
           </a:xfrm>
           <a:prstGeom prst="rect">
             <a:avLst/>
@@ -32114,7 +32054,7 @@
         <p:spPr>
           <a:xfrm>
             <a:off x="0" y="0"/>
-            <a:ext cx="9142920" cy="1004760"/>
+            <a:ext cx="9142560" cy="1004400"/>
           </a:xfrm>
           <a:prstGeom prst="rect">
             <a:avLst/>
@@ -32145,7 +32085,7 @@
         <p:spPr>
           <a:xfrm>
             <a:off x="0" y="0"/>
-            <a:ext cx="108720" cy="1004760"/>
+            <a:ext cx="108360" cy="1004400"/>
           </a:xfrm>
           <a:prstGeom prst="rect">
             <a:avLst/>
@@ -32176,7 +32116,7 @@
         <p:spPr>
           <a:xfrm>
             <a:off x="255960" y="128160"/>
-            <a:ext cx="8502840" cy="547560"/>
+            <a:ext cx="8502480" cy="547200"/>
           </a:xfrm>
           <a:prstGeom prst="rect">
             <a:avLst/>
@@ -32231,7 +32171,7 @@
         <p:spPr>
           <a:xfrm>
             <a:off x="255960" y="658440"/>
-            <a:ext cx="8502840" cy="273240"/>
+            <a:ext cx="8502480" cy="272880"/>
           </a:xfrm>
           <a:prstGeom prst="rect">
             <a:avLst/>
@@ -32286,7 +32226,7 @@
         <p:spPr>
           <a:xfrm>
             <a:off x="320040" y="1143000"/>
-            <a:ext cx="8502840" cy="1279080"/>
+            <a:ext cx="8502480" cy="1278720"/>
           </a:xfrm>
           <a:prstGeom prst="rect">
             <a:avLst/>
@@ -32324,7 +32264,7 @@
         <p:spPr>
           <a:xfrm>
             <a:off x="320040" y="1143000"/>
-            <a:ext cx="8502840" cy="72000"/>
+            <a:ext cx="8502480" cy="71640"/>
           </a:xfrm>
           <a:prstGeom prst="rect">
             <a:avLst/>
@@ -32355,7 +32295,7 @@
         <p:spPr>
           <a:xfrm>
             <a:off x="457200" y="1261800"/>
-            <a:ext cx="1370520" cy="501840"/>
+            <a:ext cx="1370160" cy="501480"/>
           </a:xfrm>
           <a:prstGeom prst="rect">
             <a:avLst/>
@@ -32410,7 +32350,7 @@
         <p:spPr>
           <a:xfrm>
             <a:off x="1828800" y="1261800"/>
-            <a:ext cx="6948360" cy="501840"/>
+            <a:ext cx="6948000" cy="501480"/>
           </a:xfrm>
           <a:prstGeom prst="rect">
             <a:avLst/>
@@ -32465,7 +32405,7 @@
         <p:spPr>
           <a:xfrm>
             <a:off x="457200" y="1664280"/>
-            <a:ext cx="8228520" cy="657360"/>
+            <a:ext cx="8228160" cy="657000"/>
           </a:xfrm>
           <a:prstGeom prst="rect">
             <a:avLst/>
@@ -32520,7 +32460,7 @@
         <p:spPr>
           <a:xfrm>
             <a:off x="320040" y="2541960"/>
-            <a:ext cx="5073840" cy="2486160"/>
+            <a:ext cx="5073480" cy="2485800"/>
           </a:xfrm>
           <a:prstGeom prst="rect">
             <a:avLst/>
@@ -32558,7 +32498,7 @@
         <p:spPr>
           <a:xfrm>
             <a:off x="457200" y="2651760"/>
-            <a:ext cx="4662360" cy="254880"/>
+            <a:ext cx="4662000" cy="254520"/>
           </a:xfrm>
           <a:prstGeom prst="rect">
             <a:avLst/>
@@ -32613,7 +32553,7 @@
         <p:spPr>
           <a:xfrm>
             <a:off x="365760" y="2944440"/>
-            <a:ext cx="4955040" cy="1937520"/>
+            <a:ext cx="4954680" cy="1937160"/>
           </a:xfrm>
           <a:prstGeom prst="rect">
             <a:avLst/>
@@ -32644,7 +32584,7 @@
         <p:spPr>
           <a:xfrm>
             <a:off x="365760" y="2944440"/>
-            <a:ext cx="565920" cy="200160"/>
+            <a:ext cx="565560" cy="199800"/>
           </a:xfrm>
           <a:prstGeom prst="rect">
             <a:avLst/>
@@ -32675,7 +32615,7 @@
         <p:spPr>
           <a:xfrm>
             <a:off x="365760" y="2944440"/>
-            <a:ext cx="565920" cy="200160"/>
+            <a:ext cx="565560" cy="199800"/>
           </a:xfrm>
           <a:prstGeom prst="rect">
             <a:avLst/>
@@ -32730,7 +32670,7 @@
         <p:spPr>
           <a:xfrm>
             <a:off x="457200" y="3200400"/>
-            <a:ext cx="4772160" cy="1635840"/>
+            <a:ext cx="4771800" cy="1635480"/>
           </a:xfrm>
           <a:prstGeom prst="rect">
             <a:avLst/>
@@ -33091,7 +33031,7 @@
         <p:spPr>
           <a:xfrm>
             <a:off x="5577840" y="2541960"/>
-            <a:ext cx="3245040" cy="2486160"/>
+            <a:ext cx="3244680" cy="2485800"/>
           </a:xfrm>
           <a:prstGeom prst="rect">
             <a:avLst/>
@@ -33129,7 +33069,7 @@
         <p:spPr>
           <a:xfrm>
             <a:off x="5715000" y="2651760"/>
-            <a:ext cx="2925000" cy="254880"/>
+            <a:ext cx="2924640" cy="254520"/>
           </a:xfrm>
           <a:prstGeom prst="rect">
             <a:avLst/>
@@ -33184,7 +33124,7 @@
         <p:spPr>
           <a:xfrm>
             <a:off x="5715000" y="2980800"/>
-            <a:ext cx="2970720" cy="1919160"/>
+            <a:ext cx="2970360" cy="1918800"/>
           </a:xfrm>
           <a:prstGeom prst="rect">
             <a:avLst/>
@@ -33340,7 +33280,7 @@
         <p:spPr>
           <a:xfrm>
             <a:off x="180000" y="5126400"/>
-            <a:ext cx="8502840" cy="273240"/>
+            <a:ext cx="8502480" cy="272880"/>
           </a:xfrm>
           <a:prstGeom prst="rect">
             <a:avLst/>
@@ -33378,7 +33318,7 @@
         <p:spPr>
           <a:xfrm>
             <a:off x="320040" y="4773240"/>
-            <a:ext cx="90360" cy="273240"/>
+            <a:ext cx="90000" cy="272880"/>
           </a:xfrm>
           <a:prstGeom prst="rect">
             <a:avLst/>
@@ -33409,7 +33349,7 @@
         <p:spPr>
           <a:xfrm>
             <a:off x="411120" y="5126400"/>
-            <a:ext cx="8228520" cy="273240"/>
+            <a:ext cx="8228160" cy="272880"/>
           </a:xfrm>
           <a:prstGeom prst="rect">
             <a:avLst/>
